--- a/analyses-project/guidance/W7_Discussion_and_conclusion.pptx
+++ b/analyses-project/guidance/W7_Discussion_and_conclusion.pptx
@@ -6231,7 +6231,7 @@
                 <a:ea typeface="Calibri" pitchFamily="34" charset="-122"/>
                 <a:cs typeface="Calibri" pitchFamily="34" charset="-120"/>
               </a:rPr>
-              <a:t>shift the ONI against cloud and recompute r. In notebook §6, positive lag = </a:t>
+              <a:t>shift the ONI against cloud and recompute r. In notebook §6, lag +3 pairs the ONI from </a:t>
             </a:r>
             <a:r>
               <a:rPr lang="en-US" sz="1500" b="1" dirty="0">
@@ -6242,6 +6242,28 @@
                 <a:ea typeface="Calibri" pitchFamily="34" charset="-122"/>
                 <a:cs typeface="Calibri" pitchFamily="34" charset="-120"/>
               </a:rPr>
+              <a:t>3 months earlier</a:t>
+            </a:r>
+            <a:r>
+              <a:rPr lang="en-US" sz="1500" dirty="0">
+                <a:solidFill>
+                  <a:srgbClr val="222B36"/>
+                </a:solidFill>
+                <a:latin typeface="Calibri" pitchFamily="34" charset="0"/>
+                <a:ea typeface="Calibri" pitchFamily="34" charset="-122"/>
+                <a:cs typeface="Calibri" pitchFamily="34" charset="-120"/>
+              </a:rPr>
+              <a:t> with cloud now (</a:t>
+            </a:r>
+            <a:r>
+              <a:rPr lang="en-US" sz="1500" b="1" dirty="0">
+                <a:solidFill>
+                  <a:srgbClr val="222B36"/>
+                </a:solidFill>
+                <a:latin typeface="Calibri" pitchFamily="34" charset="0"/>
+                <a:ea typeface="Calibri" pitchFamily="34" charset="-122"/>
+                <a:cs typeface="Calibri" pitchFamily="34" charset="-120"/>
+              </a:rPr>
               <a:t>ONI leads</a:t>
             </a:r>
             <a:r>
@@ -6253,7 +6275,7 @@
                 <a:ea typeface="Calibri" pitchFamily="34" charset="-122"/>
                 <a:cs typeface="Calibri" pitchFamily="34" charset="-120"/>
               </a:rPr>
-              <a:t>.</a:t>
+              <a:t>).</a:t>
             </a:r>
             <a:endParaRPr lang="en-US" sz="1500" dirty="0"/>
           </a:p>

--- a/analyses-project/guidance/W7_Discussion_and_conclusion.pptx
+++ b/analyses-project/guidance/W7_Discussion_and_conclusion.pptx
@@ -16,9 +16,10 @@
     <p:sldId id="264" r:id="rId10"/>
     <p:sldId id="265" r:id="rId11"/>
     <p:sldId id="266" r:id="rId12"/>
+    <p:sldId id="267" r:id="rId13"/>
   </p:sldIdLst>
   <p:notesMasterIdLst>
-    <p:notesMasterId r:id="rId13"/>
+    <p:notesMasterId r:id="rId14"/>
   </p:notesMasterIdLst>
   <p:sldSz cx="12192000" cy="6858000"/>
   <p:notesSz cx="6858000" cy="12192000"/>
@@ -730,6 +731,94 @@
 </p:notes>
 </file>
 
+<file path=ppt/notesSlides/notesSlide12.xml><?xml version="1.0" encoding="utf-8"?>
+<p:notes xmlns:a="http://schemas.openxmlformats.org/drawingml/2006/main" xmlns:r="http://schemas.openxmlformats.org/officeDocument/2006/relationships" xmlns:p="http://schemas.openxmlformats.org/presentationml/2006/main">
+  <p:cSld>
+    <p:spTree>
+      <p:nvGrpSpPr>
+        <p:cNvPr id="1" name=""/>
+        <p:cNvGrpSpPr/>
+        <p:nvPr/>
+      </p:nvGrpSpPr>
+      <p:grpSpPr>
+        <a:xfrm>
+          <a:off x="0" y="0"/>
+          <a:ext cx="0" cy="0"/>
+          <a:chOff x="0" y="0"/>
+          <a:chExt cx="0" cy="0"/>
+        </a:xfrm>
+      </p:grpSpPr>
+      <p:sp>
+        <p:nvSpPr>
+          <p:cNvPr id="2" name="Slide Image Placeholder 1"/>
+          <p:cNvSpPr>
+            <a:spLocks noGrp="1" noRot="1" noChangeAspect="1"/>
+          </p:cNvSpPr>
+          <p:nvPr>
+            <p:ph type="sldImg"/>
+          </p:nvPr>
+        </p:nvSpPr>
+        <p:spPr/>
+      </p:sp>
+      <p:sp>
+        <p:nvSpPr>
+          <p:cNvPr id="3" name="Notes Placeholder 2"/>
+          <p:cNvSpPr>
+            <a:spLocks noGrp="1"/>
+          </p:cNvSpPr>
+          <p:nvPr>
+            <p:ph type="body" idx="1"/>
+          </p:nvPr>
+        </p:nvSpPr>
+        <p:spPr/>
+        <p:txBody>
+          <a:bodyPr/>
+          <a:lstStyle/>
+          <a:p>
+            <a:r>
+              <a:rPr lang="en-US" dirty="0"/>
+              <a:t/>
+            </a:r>
+            <a:endParaRPr lang="en-US" dirty="0"/>
+          </a:p>
+        </p:txBody>
+      </p:sp>
+      <p:sp>
+        <p:nvSpPr>
+          <p:cNvPr id="4" name="Slide Number Placeholder 3"/>
+          <p:cNvSpPr>
+            <a:spLocks noGrp="1"/>
+          </p:cNvSpPr>
+          <p:nvPr>
+            <p:ph type="sldNum" sz="quarter" idx="10"/>
+          </p:nvPr>
+        </p:nvSpPr>
+        <p:spPr/>
+        <p:txBody>
+          <a:bodyPr/>
+          <a:lstStyle/>
+          <a:p>
+            <a:fld id="{F7021451-1387-4CA6-816F-3879F97B5CBC}" type="slidenum">
+              <a:rPr lang="en-US"/>
+              <a:t>12</a:t>
+            </a:fld>
+            <a:endParaRPr lang="en-US"/>
+          </a:p>
+        </p:txBody>
+      </p:sp>
+    </p:spTree>
+    <p:extLst>
+      <p:ext uri="{BB962C8B-B14F-4D97-AF65-F5344CB8AC3E}">
+        <p14:creationId xmlns:p14="http://schemas.microsoft.com/office/powerpoint/2010/main" val="1024086991"/>
+      </p:ext>
+    </p:extLst>
+  </p:cSld>
+  <p:clrMapOvr>
+    <a:masterClrMapping/>
+  </p:clrMapOvr>
+</p:notes>
+</file>
+
 <file path=ppt/notesSlides/notesSlide2.xml><?xml version="1.0" encoding="utf-8"?>
 <p:notes xmlns:a="http://schemas.openxmlformats.org/drawingml/2006/main" xmlns:r="http://schemas.openxmlformats.org/officeDocument/2006/relationships" xmlns:p="http://schemas.openxmlformats.org/presentationml/2006/main">
   <p:cSld>
@@ -865,7 +954,7 @@
             <a:r>
               <a:rPr lang="en-US" dirty="0"/>
               <a:t>EXPLANATION
-Lag correlation shifts one series against the other and recalculates r; in the notebook a positive lag means the ONI leads. If cloud responds a few months after the sea warms, the correlation peaks at a positive lag. Be careful with two things. Peaks are broad because both series change slowly, so the exact peak month is uncertain. And a lag is consistent with cause and effect but doesn't prove it: to argue cause you need a mechanism, the right order in time, and independent support, such as the sea-temperature pattern under the cloud.</a:t>
+Lag correlation shifts one series against the other and recalculates r. Be careful with the sign: in the notebook, lag +3 pairs the ONI from three months earlier with the cloud now. So a positive lag means the ONI leads; a negative lag means the cloud leads, which would be odd physically, so a peak there is a warning sign rather than a finding. If cloud responds a few months after the sea warms, the correlation peaks at a positive lag, as in this illustrative curve at +3. Be careful with two things. Peaks are broad because both series change slowly, so the exact peak month is uncertain; and the ONI is itself a 3-month running mean, which blurs timing by about a month. And a lag is consistent with cause and effect but doesn't prove it: to argue cause you need a mechanism, the right order in time, and independent support, such as the sea-temperature pattern under the cloud.</a:t>
             </a:r>
             <a:endParaRPr lang="en-US" dirty="0"/>
           </a:p>
@@ -1219,7 +1308,8 @@
           <a:p>
             <a:r>
               <a:rPr lang="en-US" dirty="0"/>
-              <a:t/>
+              <a:t>EXPLANATION
+This is a real puzzle from your own data. In the year-to-year plot, global-mean ERA5 cloud is lowest in 2022–23, and COVID is a tempting explanation. The left sentence fails two checks. Timing: lockdown emission cuts peaked in spring 2020 and had largely recovered by 2022, and their estimated global effect was small (Gettelman et al. 2021), but the cloud keeps falling through 2021–23. Data: ERA5 uses a prescribed aerosol climatology, so the model can't respond directly to a lockdown or to the 2020 shipping fuel rules. ERA5 cloud cannot test an aerosol explanation. The low cloud is real, though: satellites show Earth's albedo hit a record low in 2023, mainly from less low cloud in the northern mid-latitudes and tropics, especially the North Atlantic (Goessling et al. 2024). The cause is still debated: natural variability, cleaner air (especially the shipping sulphur cap, though its estimated effect is small and hard to detect: Zhang et al. 2025), and a feedback where warmer oceans support fewer low clouds. ENSO alone doesn't explain it: 2022 was La Niña and 2023 El Niño, and both are low. The right-hand sentence states the finding with a number, links it to published work, names the alternatives with citations, rules one out with a reason, and says what the data can't test. Use the same checks on any explanation in your own Discussion.</a:t>
             </a:r>
             <a:endParaRPr lang="en-US" dirty="0"/>
           </a:p>
@@ -2614,39 +2704,14 @@
       </p:grpSpPr>
       <p:sp>
         <p:nvSpPr>
-          <p:cNvPr id="2" name="actband_135"/>
-          <p:cNvSpPr/>
-          <p:nvPr/>
-        </p:nvSpPr>
-        <p:spPr>
-          <a:xfrm>
-            <a:off x="0" y="237744"/>
-            <a:ext cx="12191695" cy="914400"/>
-          </a:xfrm>
-          <a:prstGeom prst="rect">
-            <a:avLst/>
-          </a:prstGeom>
-          <a:solidFill>
-            <a:srgbClr val="FBEBD0"/>
-          </a:solidFill>
-          <a:ln w="12700">
-            <a:solidFill>
-              <a:srgbClr val="FBEBD0"/>
-            </a:solidFill>
-            <a:prstDash val="solid"/>
-          </a:ln>
-        </p:spPr>
-      </p:sp>
-      <p:sp>
-        <p:nvSpPr>
-          <p:cNvPr id="3" name="text_136"/>
+          <p:cNvPr id="2" name="text_132"/>
           <p:cNvSpPr txBox="1"/>
           <p:nvPr/>
         </p:nvSpPr>
         <p:spPr>
           <a:xfrm>
-            <a:off x="548640" y="329184"/>
-            <a:ext cx="5486400" cy="274320"/>
+            <a:off x="548640" y="365760"/>
+            <a:ext cx="11064240" cy="640080"/>
           </a:xfrm>
           <a:prstGeom prst="rect">
             <a:avLst/>
@@ -2655,7 +2720,7 @@
           <a:ln/>
         </p:spPr>
         <p:txBody>
-          <a:bodyPr wrap="square" lIns="635" tIns="635" rIns="635" bIns="635" rtlCol="0" anchor="t"/>
+          <a:bodyPr wrap="square" lIns="635" tIns="635" rIns="635" bIns="635" rtlCol="0" anchor="b"/>
           <a:lstStyle/>
           <a:p>
             <a:pPr algn="l" indent="0" marL="0">
@@ -2665,30 +2730,126 @@
               <a:buNone/>
             </a:pPr>
             <a:r>
-              <a:rPr lang="en-US" sz="1100" b="1" dirty="0">
-                <a:solidFill>
-                  <a:srgbClr val="D98E1F"/>
-                </a:solidFill>
-                <a:latin typeface="Calibri" pitchFamily="34" charset="0"/>
-                <a:ea typeface="Calibri" pitchFamily="34" charset="-122"/>
-                <a:cs typeface="Calibri" pitchFamily="34" charset="-120"/>
-              </a:rPr>
-              <a:t>IN-CLASS ACTIVITY  ·  16 MIN</a:t>
-            </a:r>
-            <a:endParaRPr lang="en-US" sz="1100" dirty="0"/>
-          </a:p>
-        </p:txBody>
-      </p:sp>
-      <p:sp>
-        <p:nvSpPr>
-          <p:cNvPr id="4" name="text_137"/>
+              <a:rPr lang="en-US" sz="2800" b="1" dirty="0">
+                <a:solidFill>
+                  <a:srgbClr val="1B2A41"/>
+                </a:solidFill>
+                <a:latin typeface="Georgia" pitchFamily="34" charset="0"/>
+                <a:ea typeface="Georgia" pitchFamily="34" charset="-122"/>
+                <a:cs typeface="Georgia" pitchFamily="34" charset="-120"/>
+              </a:rPr>
+              <a:t>The mirror test</a:t>
+            </a:r>
+            <a:endParaRPr lang="en-US" sz="2800" dirty="0"/>
+          </a:p>
+        </p:txBody>
+      </p:sp>
+      <p:sp>
+        <p:nvSpPr>
+          <p:cNvPr id="3" name="card_133"/>
+          <p:cNvSpPr/>
+          <p:nvPr/>
+        </p:nvSpPr>
+        <p:spPr>
+          <a:xfrm>
+            <a:off x="548640" y="1371600"/>
+            <a:ext cx="5120640" cy="3017520"/>
+          </a:xfrm>
+          <a:prstGeom prst="roundRect">
+            <a:avLst>
+              <a:gd name="adj" fmla="val 2424"/>
+            </a:avLst>
+          </a:prstGeom>
+          <a:solidFill>
+            <a:srgbClr val="DCE7F2"/>
+          </a:solidFill>
+          <a:ln w="9525">
+            <a:solidFill>
+              <a:srgbClr val="DCE7F2"/>
+            </a:solidFill>
+            <a:prstDash val="solid"/>
+          </a:ln>
+        </p:spPr>
+      </p:sp>
+      <p:sp>
+        <p:nvSpPr>
+          <p:cNvPr id="4" name="tag_134"/>
+          <p:cNvSpPr/>
+          <p:nvPr/>
+        </p:nvSpPr>
+        <p:spPr>
+          <a:xfrm>
+            <a:off x="713232" y="1499616"/>
+            <a:ext cx="1623060" cy="256032"/>
+          </a:xfrm>
+          <a:prstGeom prst="roundRect">
+            <a:avLst>
+              <a:gd name="adj" fmla="val 21429"/>
+            </a:avLst>
+          </a:prstGeom>
+          <a:solidFill>
+            <a:srgbClr val="1B2A41"/>
+          </a:solidFill>
+          <a:ln w="12700">
+            <a:solidFill>
+              <a:srgbClr val="1B2A41"/>
+            </a:solidFill>
+            <a:prstDash val="solid"/>
+          </a:ln>
+        </p:spPr>
+      </p:sp>
+      <p:sp>
+        <p:nvSpPr>
+          <p:cNvPr id="5" name="text_135"/>
           <p:cNvSpPr txBox="1"/>
           <p:nvPr/>
         </p:nvSpPr>
         <p:spPr>
           <a:xfrm>
-            <a:off x="548640" y="548640"/>
-            <a:ext cx="11064240" cy="548640"/>
+            <a:off x="713232" y="1499616"/>
+            <a:ext cx="1623060" cy="256032"/>
+          </a:xfrm>
+          <a:prstGeom prst="rect">
+            <a:avLst/>
+          </a:prstGeom>
+          <a:noFill/>
+          <a:ln/>
+        </p:spPr>
+        <p:txBody>
+          <a:bodyPr wrap="square" lIns="0" tIns="0" rIns="0" bIns="0" rtlCol="0" anchor="ctr"/>
+          <a:lstStyle/>
+          <a:p>
+            <a:pPr algn="ctr" indent="0" marL="0">
+              <a:lnSpc>
+                <a:spcPct val="100000"/>
+              </a:lnSpc>
+              <a:buNone/>
+            </a:pPr>
+            <a:r>
+              <a:rPr lang="en-US" sz="1050" b="1" dirty="0">
+                <a:solidFill>
+                  <a:srgbClr val="FFFFFF"/>
+                </a:solidFill>
+                <a:latin typeface="Calibri" pitchFamily="34" charset="0"/>
+                <a:ea typeface="Calibri" pitchFamily="34" charset="-122"/>
+                <a:cs typeface="Calibri" pitchFamily="34" charset="-120"/>
+              </a:rPr>
+              <a:t>END OF INTRODUCTION</a:t>
+            </a:r>
+            <a:endParaRPr lang="en-US" sz="1050" dirty="0"/>
+          </a:p>
+        </p:txBody>
+      </p:sp>
+      <p:sp>
+        <p:nvSpPr>
+          <p:cNvPr id="6" name="text_136"/>
+          <p:cNvSpPr txBox="1"/>
+          <p:nvPr/>
+        </p:nvSpPr>
+        <p:spPr>
+          <a:xfrm>
+            <a:off x="713232" y="1847088"/>
+            <a:ext cx="4791456" cy="2450592"/>
           </a:xfrm>
           <a:prstGeom prst="rect">
             <a:avLst/>
@@ -2707,33 +2868,248 @@
               <a:buNone/>
             </a:pPr>
             <a:r>
-              <a:rPr lang="en-US" sz="2600" b="1" dirty="0">
-                <a:solidFill>
-                  <a:srgbClr val="1B2A41"/>
+              <a:rPr lang="en-US" sz="1500" i="1" dirty="0">
+                <a:solidFill>
+                  <a:srgbClr val="222B36"/>
                 </a:solidFill>
                 <a:latin typeface="Georgia" pitchFamily="34" charset="0"/>
                 <a:ea typeface="Georgia" pitchFamily="34" charset="-122"/>
                 <a:cs typeface="Georgia" pitchFamily="34" charset="-120"/>
               </a:rPr>
-              <a:t>Plan the Discussion, draft the landing</a:t>
-            </a:r>
-            <a:endParaRPr lang="en-US" sz="2600" dirty="0"/>
-          </a:p>
-        </p:txBody>
-      </p:sp>
-      <p:sp>
-        <p:nvSpPr>
-          <p:cNvPr id="5" name="num_138"/>
+              <a:t>“The purpose of this report is to test whether high cloud over the central Pacific (CP) and the Maritime Continent (MC) responds to ENSO in opposite senses, and to compare the strength of each relationship with the ONI.”</a:t>
+            </a:r>
+            <a:endParaRPr lang="en-US" sz="1500" dirty="0"/>
+          </a:p>
+        </p:txBody>
+      </p:sp>
+      <p:sp>
+        <p:nvSpPr>
+          <p:cNvPr id="7" name="card_137"/>
           <p:cNvSpPr/>
           <p:nvPr/>
         </p:nvSpPr>
         <p:spPr>
           <a:xfrm>
-            <a:off x="594360" y="1435608"/>
-            <a:ext cx="365760" cy="365760"/>
-          </a:xfrm>
-          <a:prstGeom prst="ellipse">
-            <a:avLst/>
+            <a:off x="6519672" y="1371600"/>
+            <a:ext cx="5120640" cy="3017520"/>
+          </a:xfrm>
+          <a:prstGeom prst="roundRect">
+            <a:avLst>
+              <a:gd name="adj" fmla="val 2424"/>
+            </a:avLst>
+          </a:prstGeom>
+          <a:solidFill>
+            <a:srgbClr val="DCEFEA"/>
+          </a:solidFill>
+          <a:ln w="9525">
+            <a:solidFill>
+              <a:srgbClr val="DCEFEA"/>
+            </a:solidFill>
+            <a:prstDash val="solid"/>
+          </a:ln>
+        </p:spPr>
+      </p:sp>
+      <p:sp>
+        <p:nvSpPr>
+          <p:cNvPr id="8" name="tag_138"/>
+          <p:cNvSpPr/>
+          <p:nvPr/>
+        </p:nvSpPr>
+        <p:spPr>
+          <a:xfrm>
+            <a:off x="6684264" y="1499616"/>
+            <a:ext cx="1623060" cy="256032"/>
+          </a:xfrm>
+          <a:prstGeom prst="roundRect">
+            <a:avLst>
+              <a:gd name="adj" fmla="val 21429"/>
+            </a:avLst>
+          </a:prstGeom>
+          <a:solidFill>
+            <a:srgbClr val="1F7A6E"/>
+          </a:solidFill>
+          <a:ln w="12700">
+            <a:solidFill>
+              <a:srgbClr val="1F7A6E"/>
+            </a:solidFill>
+            <a:prstDash val="solid"/>
+          </a:ln>
+        </p:spPr>
+      </p:sp>
+      <p:sp>
+        <p:nvSpPr>
+          <p:cNvPr id="9" name="text_139"/>
+          <p:cNvSpPr txBox="1"/>
+          <p:nvPr/>
+        </p:nvSpPr>
+        <p:spPr>
+          <a:xfrm>
+            <a:off x="6684264" y="1499616"/>
+            <a:ext cx="1623060" cy="256032"/>
+          </a:xfrm>
+          <a:prstGeom prst="rect">
+            <a:avLst/>
+          </a:prstGeom>
+          <a:noFill/>
+          <a:ln/>
+        </p:spPr>
+        <p:txBody>
+          <a:bodyPr wrap="square" lIns="0" tIns="0" rIns="0" bIns="0" rtlCol="0" anchor="ctr"/>
+          <a:lstStyle/>
+          <a:p>
+            <a:pPr algn="ctr" indent="0" marL="0">
+              <a:lnSpc>
+                <a:spcPct val="100000"/>
+              </a:lnSpc>
+              <a:buNone/>
+            </a:pPr>
+            <a:r>
+              <a:rPr lang="en-US" sz="1050" b="1" dirty="0">
+                <a:solidFill>
+                  <a:srgbClr val="FFFFFF"/>
+                </a:solidFill>
+                <a:latin typeface="Calibri" pitchFamily="34" charset="0"/>
+                <a:ea typeface="Calibri" pitchFamily="34" charset="-122"/>
+                <a:cs typeface="Calibri" pitchFamily="34" charset="-120"/>
+              </a:rPr>
+              <a:t>START OF CONCLUSION</a:t>
+            </a:r>
+            <a:endParaRPr lang="en-US" sz="1050" dirty="0"/>
+          </a:p>
+        </p:txBody>
+      </p:sp>
+      <p:sp>
+        <p:nvSpPr>
+          <p:cNvPr id="10" name="text_140"/>
+          <p:cNvSpPr txBox="1"/>
+          <p:nvPr/>
+        </p:nvSpPr>
+        <p:spPr>
+          <a:xfrm>
+            <a:off x="6684264" y="1847088"/>
+            <a:ext cx="4791456" cy="2450592"/>
+          </a:xfrm>
+          <a:prstGeom prst="rect">
+            <a:avLst/>
+          </a:prstGeom>
+          <a:noFill/>
+          <a:ln/>
+        </p:spPr>
+        <p:txBody>
+          <a:bodyPr wrap="square" lIns="635" tIns="635" rIns="635" bIns="635" rtlCol="0" anchor="t"/>
+          <a:lstStyle/>
+          <a:p>
+            <a:pPr algn="l" indent="0" marL="0">
+              <a:lnSpc>
+                <a:spcPct val="100000"/>
+              </a:lnSpc>
+              <a:buNone/>
+            </a:pPr>
+            <a:r>
+              <a:rPr lang="en-US" sz="1500" i="1" dirty="0">
+                <a:solidFill>
+                  <a:srgbClr val="222B36"/>
+                </a:solidFill>
+                <a:latin typeface="Georgia" pitchFamily="34" charset="0"/>
+                <a:ea typeface="Georgia" pitchFamily="34" charset="-122"/>
+                <a:cs typeface="Georgia" pitchFamily="34" charset="-120"/>
+              </a:rPr>
+              <a:t>“High cloud over CP and MC responds to ENSO in opposite senses, and the MC relationship with the ONI is the weaker of the two (r = [ ] vs [ ]).”</a:t>
+            </a:r>
+            <a:endParaRPr lang="en-US" sz="1500" dirty="0"/>
+          </a:p>
+        </p:txBody>
+      </p:sp>
+      <p:sp>
+        <p:nvSpPr>
+          <p:cNvPr id="11" name="arrow_141"/>
+          <p:cNvSpPr/>
+          <p:nvPr/>
+        </p:nvSpPr>
+        <p:spPr>
+          <a:xfrm>
+            <a:off x="5760720" y="2743200"/>
+            <a:ext cx="667512" cy="914"/>
+          </a:xfrm>
+          <a:prstGeom prst="line">
+            <a:avLst/>
+          </a:prstGeom>
+          <a:noFill/>
+          <a:ln w="31750">
+            <a:solidFill>
+              <a:srgbClr val="D98E1F"/>
+            </a:solidFill>
+            <a:prstDash val="solid"/>
+            <a:tailEnd type="triangle"/>
+          </a:ln>
+        </p:spPr>
+      </p:sp>
+      <p:sp>
+        <p:nvSpPr>
+          <p:cNvPr id="12" name="arrow_142"/>
+          <p:cNvSpPr/>
+          <p:nvPr/>
+        </p:nvSpPr>
+        <p:spPr>
+          <a:xfrm flipH="1">
+            <a:off x="5760720" y="3017520"/>
+            <a:ext cx="667512" cy="914"/>
+          </a:xfrm>
+          <a:prstGeom prst="line">
+            <a:avLst/>
+          </a:prstGeom>
+          <a:noFill/>
+          <a:ln w="31750">
+            <a:solidFill>
+              <a:srgbClr val="D98E1F"/>
+            </a:solidFill>
+            <a:prstDash val="solid"/>
+            <a:tailEnd type="triangle"/>
+          </a:ln>
+        </p:spPr>
+      </p:sp>
+      <p:sp>
+        <p:nvSpPr>
+          <p:cNvPr id="13" name="card_143"/>
+          <p:cNvSpPr/>
+          <p:nvPr/>
+        </p:nvSpPr>
+        <p:spPr>
+          <a:xfrm>
+            <a:off x="548640" y="4572000"/>
+            <a:ext cx="11091672" cy="1691640"/>
+          </a:xfrm>
+          <a:prstGeom prst="roundRect">
+            <a:avLst>
+              <a:gd name="adj" fmla="val 4324"/>
+            </a:avLst>
+          </a:prstGeom>
+          <a:solidFill>
+            <a:srgbClr val="F7F4EE"/>
+          </a:solidFill>
+          <a:ln w="9525">
+            <a:solidFill>
+              <a:srgbClr val="D5DAE1"/>
+            </a:solidFill>
+            <a:prstDash val="solid"/>
+          </a:ln>
+        </p:spPr>
+      </p:sp>
+      <p:sp>
+        <p:nvSpPr>
+          <p:cNvPr id="14" name="tag_144"/>
+          <p:cNvSpPr/>
+          <p:nvPr/>
+        </p:nvSpPr>
+        <p:spPr>
+          <a:xfrm>
+            <a:off x="713232" y="4700016"/>
+            <a:ext cx="2400300" cy="256032"/>
+          </a:xfrm>
+          <a:prstGeom prst="roundRect">
+            <a:avLst>
+              <a:gd name="adj" fmla="val 21429"/>
+            </a:avLst>
           </a:prstGeom>
           <a:solidFill>
             <a:srgbClr val="D98E1F"/>
@@ -2748,14 +3124,14 @@
       </p:sp>
       <p:sp>
         <p:nvSpPr>
-          <p:cNvPr id="6" name="text_139"/>
+          <p:cNvPr id="15" name="text_145"/>
           <p:cNvSpPr txBox="1"/>
           <p:nvPr/>
         </p:nvSpPr>
         <p:spPr>
           <a:xfrm>
-            <a:off x="594360" y="1435608"/>
-            <a:ext cx="365760" cy="365760"/>
+            <a:off x="713232" y="4700016"/>
+            <a:ext cx="2400300" cy="256032"/>
           </a:xfrm>
           <a:prstGeom prst="rect">
             <a:avLst/>
@@ -2774,7 +3150,7 @@
               <a:buNone/>
             </a:pPr>
             <a:r>
-              <a:rPr lang="en-US" sz="1200" b="1" dirty="0">
+              <a:rPr lang="en-US" sz="1050" b="1" dirty="0">
                 <a:solidFill>
                   <a:srgbClr val="FFFFFF"/>
                 </a:solidFill>
@@ -2782,22 +3158,173 @@
                 <a:ea typeface="Calibri" pitchFamily="34" charset="-122"/>
                 <a:cs typeface="Calibri" pitchFamily="34" charset="-120"/>
               </a:rPr>
-              <a:t>1</a:t>
-            </a:r>
-            <a:endParaRPr lang="en-US" sz="1200" dirty="0"/>
-          </a:p>
-        </p:txBody>
-      </p:sp>
-      <p:sp>
-        <p:nvSpPr>
-          <p:cNvPr id="7" name="text_140"/>
+              <a:t>PUT THEM SIDE BY SIDE AND ASK</a:t>
+            </a:r>
+            <a:endParaRPr lang="en-US" sz="1050" dirty="0"/>
+          </a:p>
+        </p:txBody>
+      </p:sp>
+      <p:sp>
+        <p:nvSpPr>
+          <p:cNvPr id="16" name="cardbody_146"/>
           <p:cNvSpPr txBox="1"/>
           <p:nvPr/>
         </p:nvSpPr>
         <p:spPr>
           <a:xfrm>
-            <a:off x="1097280" y="1417320"/>
-            <a:ext cx="6126480" cy="658368"/>
+            <a:off x="713232" y="5047488"/>
+            <a:ext cx="10762488" cy="1124712"/>
+          </a:xfrm>
+          <a:prstGeom prst="rect">
+            <a:avLst/>
+          </a:prstGeom>
+          <a:noFill/>
+          <a:ln/>
+        </p:spPr>
+        <p:txBody>
+          <a:bodyPr wrap="square" lIns="381" tIns="381" rIns="381" bIns="381" rtlCol="0" anchor="t"/>
+          <a:lstStyle/>
+          <a:p>
+            <a:pPr marL="342900" indent="-342900">
+              <a:spcAft>
+                <a:spcPts val="300"/>
+              </a:spcAft>
+              <a:buSzPct val="100000"/>
+              <a:buChar char="■"/>
+            </a:pPr>
+            <a:r>
+              <a:rPr lang="en-US" sz="1450" dirty="0">
+                <a:solidFill>
+                  <a:srgbClr val="222B36"/>
+                </a:solidFill>
+                <a:latin typeface="Calibri" pitchFamily="34" charset="0"/>
+                <a:ea typeface="Calibri" pitchFamily="34" charset="-122"/>
+                <a:cs typeface="Calibri" pitchFamily="34" charset="-120"/>
+              </a:rPr>
+              <a:t>Does the conclusion answer </a:t>
+            </a:r>
+            <a:r>
+              <a:rPr lang="en-US" sz="1450" b="1" dirty="0">
+                <a:solidFill>
+                  <a:srgbClr val="222B36"/>
+                </a:solidFill>
+                <a:latin typeface="Calibri" pitchFamily="34" charset="0"/>
+                <a:ea typeface="Calibri" pitchFamily="34" charset="-122"/>
+                <a:cs typeface="Calibri" pitchFamily="34" charset="-120"/>
+              </a:rPr>
+              <a:t>exactly</a:t>
+            </a:r>
+            <a:r>
+              <a:rPr lang="en-US" sz="1450" dirty="0">
+                <a:solidFill>
+                  <a:srgbClr val="222B36"/>
+                </a:solidFill>
+                <a:latin typeface="Calibri" pitchFamily="34" charset="0"/>
+                <a:ea typeface="Calibri" pitchFamily="34" charset="-122"/>
+                <a:cs typeface="Calibri" pitchFamily="34" charset="-120"/>
+              </a:rPr>
+              <a:t> what the purpose promised: not more, not less?</a:t>
+            </a:r>
+            <a:endParaRPr lang="en-US" sz="1450" dirty="0"/>
+          </a:p>
+          <a:p>
+            <a:pPr marL="342900" indent="-342900">
+              <a:spcAft>
+                <a:spcPts val="300"/>
+              </a:spcAft>
+              <a:buSzPct val="100000"/>
+              <a:buChar char="■"/>
+            </a:pPr>
+            <a:r>
+              <a:rPr lang="en-US" sz="1450" dirty="0">
+                <a:solidFill>
+                  <a:srgbClr val="222B36"/>
+                </a:solidFill>
+                <a:latin typeface="Calibri" pitchFamily="34" charset="0"/>
+                <a:ea typeface="Calibri" pitchFamily="34" charset="-122"/>
+                <a:cs typeface="Calibri" pitchFamily="34" charset="-120"/>
+              </a:rPr>
+              <a:t>Are the </a:t>
+            </a:r>
+            <a:r>
+              <a:rPr lang="en-US" sz="1450" b="1" dirty="0">
+                <a:solidFill>
+                  <a:srgbClr val="222B36"/>
+                </a:solidFill>
+                <a:latin typeface="Calibri" pitchFamily="34" charset="0"/>
+                <a:ea typeface="Calibri" pitchFamily="34" charset="-122"/>
+                <a:cs typeface="Calibri" pitchFamily="34" charset="-120"/>
+              </a:rPr>
+              <a:t>same tag-phrases</a:t>
+            </a:r>
+            <a:r>
+              <a:rPr lang="en-US" sz="1450" dirty="0">
+                <a:solidFill>
+                  <a:srgbClr val="222B36"/>
+                </a:solidFill>
+                <a:latin typeface="Calibri" pitchFamily="34" charset="0"/>
+                <a:ea typeface="Calibri" pitchFamily="34" charset="-122"/>
+                <a:cs typeface="Calibri" pitchFamily="34" charset="-120"/>
+              </a:rPr>
+              <a:t> used (CP, MC, ONI)?</a:t>
+            </a:r>
+            <a:endParaRPr lang="en-US" sz="1450" dirty="0"/>
+          </a:p>
+          <a:p>
+            <a:pPr marL="342900" indent="-342900">
+              <a:spcAft>
+                <a:spcPts val="300"/>
+              </a:spcAft>
+              <a:buSzPct val="100000"/>
+              <a:buChar char="■"/>
+            </a:pPr>
+            <a:r>
+              <a:rPr lang="en-US" sz="1450" dirty="0">
+                <a:solidFill>
+                  <a:srgbClr val="222B36"/>
+                </a:solidFill>
+                <a:latin typeface="Calibri" pitchFamily="34" charset="0"/>
+                <a:ea typeface="Calibri" pitchFamily="34" charset="-122"/>
+                <a:cs typeface="Calibri" pitchFamily="34" charset="-120"/>
+              </a:rPr>
+              <a:t>Would a reader who read only these two boxes know your question </a:t>
+            </a:r>
+            <a:r>
+              <a:rPr lang="en-US" sz="1450" b="1" dirty="0">
+                <a:solidFill>
+                  <a:srgbClr val="222B36"/>
+                </a:solidFill>
+                <a:latin typeface="Calibri" pitchFamily="34" charset="0"/>
+                <a:ea typeface="Calibri" pitchFamily="34" charset="-122"/>
+                <a:cs typeface="Calibri" pitchFamily="34" charset="-120"/>
+              </a:rPr>
+              <a:t>and</a:t>
+            </a:r>
+            <a:r>
+              <a:rPr lang="en-US" sz="1450" dirty="0">
+                <a:solidFill>
+                  <a:srgbClr val="222B36"/>
+                </a:solidFill>
+                <a:latin typeface="Calibri" pitchFamily="34" charset="0"/>
+                <a:ea typeface="Calibri" pitchFamily="34" charset="-122"/>
+                <a:cs typeface="Calibri" pitchFamily="34" charset="-120"/>
+              </a:rPr>
+              <a:t> your answer? (Many will read only these.)</a:t>
+            </a:r>
+            <a:endParaRPr lang="en-US" sz="1450" dirty="0"/>
+          </a:p>
+        </p:txBody>
+      </p:sp>
+      <p:sp>
+        <p:nvSpPr>
+          <p:cNvPr id="17" name="text_147"/>
+          <p:cNvSpPr txBox="1"/>
+          <p:nvPr/>
+        </p:nvSpPr>
+        <p:spPr>
+          <a:xfrm>
+            <a:off x="548640" y="6446520"/>
+            <a:ext cx="10424160" cy="256032"/>
           </a:xfrm>
           <a:prstGeom prst="rect">
             <a:avLst/>
@@ -2816,969 +3343,17 @@
               <a:buNone/>
             </a:pPr>
             <a:r>
-              <a:rPr lang="en-US" sz="1500" dirty="0">
-                <a:solidFill>
-                  <a:srgbClr val="222B36"/>
-                </a:solidFill>
-                <a:latin typeface="Calibri" pitchFamily="34" charset="0"/>
-                <a:ea typeface="Calibri" pitchFamily="34" charset="-122"/>
-                <a:cs typeface="Calibri" pitchFamily="34" charset="-120"/>
-              </a:rPr>
-              <a:t>From your parking lot and brainstorm, choose </a:t>
-            </a:r>
-            <a:r>
-              <a:rPr lang="en-US" sz="1500" b="1" dirty="0">
-                <a:solidFill>
-                  <a:srgbClr val="222B36"/>
-                </a:solidFill>
-                <a:latin typeface="Calibri" pitchFamily="34" charset="0"/>
-                <a:ea typeface="Calibri" pitchFamily="34" charset="-122"/>
-                <a:cs typeface="Calibri" pitchFamily="34" charset="-120"/>
-              </a:rPr>
-              <a:t>3–4 moves</a:t>
-            </a:r>
-            <a:r>
-              <a:rPr lang="en-US" sz="1500" dirty="0">
-                <a:solidFill>
-                  <a:srgbClr val="222B36"/>
-                </a:solidFill>
-                <a:latin typeface="Calibri" pitchFamily="34" charset="0"/>
-                <a:ea typeface="Calibri" pitchFamily="34" charset="-122"/>
-                <a:cs typeface="Calibri" pitchFamily="34" charset="-120"/>
-              </a:rPr>
-              <a:t> from the menu. EXPLAIN and BACK TO THE QUESTION are compulsory.</a:t>
-            </a:r>
-            <a:endParaRPr lang="en-US" sz="1500" dirty="0"/>
-          </a:p>
-        </p:txBody>
-      </p:sp>
-      <p:sp>
-        <p:nvSpPr>
-          <p:cNvPr id="8" name="num_141"/>
-          <p:cNvSpPr/>
-          <p:nvPr/>
-        </p:nvSpPr>
-        <p:spPr>
-          <a:xfrm>
-            <a:off x="594360" y="2221992"/>
-            <a:ext cx="365760" cy="365760"/>
-          </a:xfrm>
-          <a:prstGeom prst="ellipse">
-            <a:avLst/>
-          </a:prstGeom>
-          <a:solidFill>
-            <a:srgbClr val="D98E1F"/>
-          </a:solidFill>
-          <a:ln w="12700">
-            <a:solidFill>
-              <a:srgbClr val="D98E1F"/>
-            </a:solidFill>
-            <a:prstDash val="solid"/>
-          </a:ln>
-        </p:spPr>
-      </p:sp>
-      <p:sp>
-        <p:nvSpPr>
-          <p:cNvPr id="9" name="text_142"/>
-          <p:cNvSpPr txBox="1"/>
-          <p:nvPr/>
-        </p:nvSpPr>
-        <p:spPr>
-          <a:xfrm>
-            <a:off x="594360" y="2221992"/>
-            <a:ext cx="365760" cy="365760"/>
-          </a:xfrm>
-          <a:prstGeom prst="rect">
-            <a:avLst/>
-          </a:prstGeom>
-          <a:noFill/>
-          <a:ln/>
-        </p:spPr>
-        <p:txBody>
-          <a:bodyPr wrap="square" lIns="0" tIns="0" rIns="0" bIns="0" rtlCol="0" anchor="ctr"/>
-          <a:lstStyle/>
-          <a:p>
-            <a:pPr algn="ctr" indent="0" marL="0">
-              <a:lnSpc>
-                <a:spcPct val="100000"/>
-              </a:lnSpc>
-              <a:buNone/>
-            </a:pPr>
-            <a:r>
-              <a:rPr lang="en-US" sz="1200" b="1" dirty="0">
-                <a:solidFill>
-                  <a:srgbClr val="FFFFFF"/>
-                </a:solidFill>
-                <a:latin typeface="Calibri" pitchFamily="34" charset="0"/>
-                <a:ea typeface="Calibri" pitchFamily="34" charset="-122"/>
-                <a:cs typeface="Calibri" pitchFamily="34" charset="-120"/>
-              </a:rPr>
-              <a:t>2</a:t>
-            </a:r>
-            <a:endParaRPr lang="en-US" sz="1200" dirty="0"/>
-          </a:p>
-        </p:txBody>
-      </p:sp>
-      <p:sp>
-        <p:nvSpPr>
-          <p:cNvPr id="10" name="text_143"/>
-          <p:cNvSpPr txBox="1"/>
-          <p:nvPr/>
-        </p:nvSpPr>
-        <p:spPr>
-          <a:xfrm>
-            <a:off x="1097280" y="2203704"/>
-            <a:ext cx="6126480" cy="457200"/>
-          </a:xfrm>
-          <a:prstGeom prst="rect">
-            <a:avLst/>
-          </a:prstGeom>
-          <a:noFill/>
-          <a:ln/>
-        </p:spPr>
-        <p:txBody>
-          <a:bodyPr wrap="square" lIns="635" tIns="635" rIns="635" bIns="635" rtlCol="0" anchor="t"/>
-          <a:lstStyle/>
-          <a:p>
-            <a:pPr algn="l" indent="0" marL="0">
-              <a:lnSpc>
-                <a:spcPct val="100000"/>
-              </a:lnSpc>
-              <a:buNone/>
-            </a:pPr>
-            <a:r>
-              <a:rPr lang="en-US" sz="1500" dirty="0">
-                <a:solidFill>
-                  <a:srgbClr val="222B36"/>
-                </a:solidFill>
-                <a:latin typeface="Calibri" pitchFamily="34" charset="0"/>
-                <a:ea typeface="Calibri" pitchFamily="34" charset="-122"/>
-                <a:cs typeface="Calibri" pitchFamily="34" charset="-120"/>
-              </a:rPr>
-              <a:t>Write the </a:t>
-            </a:r>
-            <a:r>
-              <a:rPr lang="en-US" sz="1500" b="1" dirty="0">
-                <a:solidFill>
-                  <a:srgbClr val="222B36"/>
-                </a:solidFill>
-                <a:latin typeface="Calibri" pitchFamily="34" charset="0"/>
-                <a:ea typeface="Calibri" pitchFamily="34" charset="-122"/>
-                <a:cs typeface="Calibri" pitchFamily="34" charset="-120"/>
-              </a:rPr>
-              <a:t>topic sentence</a:t>
-            </a:r>
-            <a:r>
-              <a:rPr lang="en-US" sz="1500" dirty="0">
-                <a:solidFill>
-                  <a:srgbClr val="222B36"/>
-                </a:solidFill>
-                <a:latin typeface="Calibri" pitchFamily="34" charset="0"/>
-                <a:ea typeface="Calibri" pitchFamily="34" charset="-122"/>
-                <a:cs typeface="Calibri" pitchFamily="34" charset="-120"/>
-              </a:rPr>
-              <a:t> for each Discussion paragraph.</a:t>
-            </a:r>
-            <a:endParaRPr lang="en-US" sz="1500" dirty="0"/>
-          </a:p>
-        </p:txBody>
-      </p:sp>
-      <p:sp>
-        <p:nvSpPr>
-          <p:cNvPr id="11" name="num_144"/>
-          <p:cNvSpPr/>
-          <p:nvPr/>
-        </p:nvSpPr>
-        <p:spPr>
-          <a:xfrm>
-            <a:off x="594360" y="2807208"/>
-            <a:ext cx="365760" cy="365760"/>
-          </a:xfrm>
-          <a:prstGeom prst="ellipse">
-            <a:avLst/>
-          </a:prstGeom>
-          <a:solidFill>
-            <a:srgbClr val="D98E1F"/>
-          </a:solidFill>
-          <a:ln w="12700">
-            <a:solidFill>
-              <a:srgbClr val="D98E1F"/>
-            </a:solidFill>
-            <a:prstDash val="solid"/>
-          </a:ln>
-        </p:spPr>
-      </p:sp>
-      <p:sp>
-        <p:nvSpPr>
-          <p:cNvPr id="12" name="text_145"/>
-          <p:cNvSpPr txBox="1"/>
-          <p:nvPr/>
-        </p:nvSpPr>
-        <p:spPr>
-          <a:xfrm>
-            <a:off x="594360" y="2807208"/>
-            <a:ext cx="365760" cy="365760"/>
-          </a:xfrm>
-          <a:prstGeom prst="rect">
-            <a:avLst/>
-          </a:prstGeom>
-          <a:noFill/>
-          <a:ln/>
-        </p:spPr>
-        <p:txBody>
-          <a:bodyPr wrap="square" lIns="0" tIns="0" rIns="0" bIns="0" rtlCol="0" anchor="ctr"/>
-          <a:lstStyle/>
-          <a:p>
-            <a:pPr algn="ctr" indent="0" marL="0">
-              <a:lnSpc>
-                <a:spcPct val="100000"/>
-              </a:lnSpc>
-              <a:buNone/>
-            </a:pPr>
-            <a:r>
-              <a:rPr lang="en-US" sz="1200" b="1" dirty="0">
-                <a:solidFill>
-                  <a:srgbClr val="FFFFFF"/>
-                </a:solidFill>
-                <a:latin typeface="Calibri" pitchFamily="34" charset="0"/>
-                <a:ea typeface="Calibri" pitchFamily="34" charset="-122"/>
-                <a:cs typeface="Calibri" pitchFamily="34" charset="-120"/>
-              </a:rPr>
-              <a:t>3</a:t>
-            </a:r>
-            <a:endParaRPr lang="en-US" sz="1200" dirty="0"/>
-          </a:p>
-        </p:txBody>
-      </p:sp>
-      <p:sp>
-        <p:nvSpPr>
-          <p:cNvPr id="13" name="text_146"/>
-          <p:cNvSpPr txBox="1"/>
-          <p:nvPr/>
-        </p:nvSpPr>
-        <p:spPr>
-          <a:xfrm>
-            <a:off x="1097280" y="2788920"/>
-            <a:ext cx="6126480" cy="658368"/>
-          </a:xfrm>
-          <a:prstGeom prst="rect">
-            <a:avLst/>
-          </a:prstGeom>
-          <a:noFill/>
-          <a:ln/>
-        </p:spPr>
-        <p:txBody>
-          <a:bodyPr wrap="square" lIns="635" tIns="635" rIns="635" bIns="635" rtlCol="0" anchor="t"/>
-          <a:lstStyle/>
-          <a:p>
-            <a:pPr algn="l" indent="0" marL="0">
-              <a:lnSpc>
-                <a:spcPct val="100000"/>
-              </a:lnSpc>
-              <a:buNone/>
-            </a:pPr>
-            <a:r>
-              <a:rPr lang="en-US" sz="1500" dirty="0">
-                <a:solidFill>
-                  <a:srgbClr val="222B36"/>
-                </a:solidFill>
-                <a:latin typeface="Calibri" pitchFamily="34" charset="0"/>
-                <a:ea typeface="Calibri" pitchFamily="34" charset="-122"/>
-                <a:cs typeface="Calibri" pitchFamily="34" charset="-120"/>
-              </a:rPr>
-              <a:t>For your best limitation, write it the ‘strong’ way: </a:t>
-            </a:r>
-            <a:r>
-              <a:rPr lang="en-US" sz="1500" b="1" dirty="0">
-                <a:solidFill>
-                  <a:srgbClr val="222B36"/>
-                </a:solidFill>
-                <a:latin typeface="Calibri" pitchFamily="34" charset="0"/>
-                <a:ea typeface="Calibri" pitchFamily="34" charset="-122"/>
-                <a:cs typeface="Calibri" pitchFamily="34" charset="-120"/>
-              </a:rPr>
-              <a:t>what, how much, effect on the answer, a check</a:t>
-            </a:r>
-            <a:r>
-              <a:rPr lang="en-US" sz="1500" dirty="0">
-                <a:solidFill>
-                  <a:srgbClr val="222B36"/>
-                </a:solidFill>
-                <a:latin typeface="Calibri" pitchFamily="34" charset="0"/>
-                <a:ea typeface="Calibri" pitchFamily="34" charset="-122"/>
-                <a:cs typeface="Calibri" pitchFamily="34" charset="-120"/>
-              </a:rPr>
-              <a:t>.</a:t>
-            </a:r>
-            <a:endParaRPr lang="en-US" sz="1500" dirty="0"/>
-          </a:p>
-        </p:txBody>
-      </p:sp>
-      <p:sp>
-        <p:nvSpPr>
-          <p:cNvPr id="14" name="num_147"/>
-          <p:cNvSpPr/>
-          <p:nvPr/>
-        </p:nvSpPr>
-        <p:spPr>
-          <a:xfrm>
-            <a:off x="594360" y="3593592"/>
-            <a:ext cx="365760" cy="365760"/>
-          </a:xfrm>
-          <a:prstGeom prst="ellipse">
-            <a:avLst/>
-          </a:prstGeom>
-          <a:solidFill>
-            <a:srgbClr val="D98E1F"/>
-          </a:solidFill>
-          <a:ln w="12700">
-            <a:solidFill>
-              <a:srgbClr val="D98E1F"/>
-            </a:solidFill>
-            <a:prstDash val="solid"/>
-          </a:ln>
-        </p:spPr>
-      </p:sp>
-      <p:sp>
-        <p:nvSpPr>
-          <p:cNvPr id="15" name="text_148"/>
-          <p:cNvSpPr txBox="1"/>
-          <p:nvPr/>
-        </p:nvSpPr>
-        <p:spPr>
-          <a:xfrm>
-            <a:off x="594360" y="3593592"/>
-            <a:ext cx="365760" cy="365760"/>
-          </a:xfrm>
-          <a:prstGeom prst="rect">
-            <a:avLst/>
-          </a:prstGeom>
-          <a:noFill/>
-          <a:ln/>
-        </p:spPr>
-        <p:txBody>
-          <a:bodyPr wrap="square" lIns="0" tIns="0" rIns="0" bIns="0" rtlCol="0" anchor="ctr"/>
-          <a:lstStyle/>
-          <a:p>
-            <a:pPr algn="ctr" indent="0" marL="0">
-              <a:lnSpc>
-                <a:spcPct val="100000"/>
-              </a:lnSpc>
-              <a:buNone/>
-            </a:pPr>
-            <a:r>
-              <a:rPr lang="en-US" sz="1200" b="1" dirty="0">
-                <a:solidFill>
-                  <a:srgbClr val="FFFFFF"/>
-                </a:solidFill>
-                <a:latin typeface="Calibri" pitchFamily="34" charset="0"/>
-                <a:ea typeface="Calibri" pitchFamily="34" charset="-122"/>
-                <a:cs typeface="Calibri" pitchFamily="34" charset="-120"/>
-              </a:rPr>
-              <a:t>4</a:t>
-            </a:r>
-            <a:endParaRPr lang="en-US" sz="1200" dirty="0"/>
-          </a:p>
-        </p:txBody>
-      </p:sp>
-      <p:sp>
-        <p:nvSpPr>
-          <p:cNvPr id="16" name="text_149"/>
-          <p:cNvSpPr txBox="1"/>
-          <p:nvPr/>
-        </p:nvSpPr>
-        <p:spPr>
-          <a:xfrm>
-            <a:off x="1097280" y="3575304"/>
-            <a:ext cx="6126480" cy="658368"/>
-          </a:xfrm>
-          <a:prstGeom prst="rect">
-            <a:avLst/>
-          </a:prstGeom>
-          <a:noFill/>
-          <a:ln/>
-        </p:spPr>
-        <p:txBody>
-          <a:bodyPr wrap="square" lIns="635" tIns="635" rIns="635" bIns="635" rtlCol="0" anchor="t"/>
-          <a:lstStyle/>
-          <a:p>
-            <a:pPr algn="l" indent="0" marL="0">
-              <a:lnSpc>
-                <a:spcPct val="100000"/>
-              </a:lnSpc>
-              <a:buNone/>
-            </a:pPr>
-            <a:r>
-              <a:rPr lang="en-US" sz="1500" dirty="0">
-                <a:solidFill>
-                  <a:srgbClr val="222B36"/>
-                </a:solidFill>
-                <a:latin typeface="Calibri" pitchFamily="34" charset="0"/>
-                <a:ea typeface="Calibri" pitchFamily="34" charset="-122"/>
-                <a:cs typeface="Calibri" pitchFamily="34" charset="-120"/>
-              </a:rPr>
-              <a:t>Draft the </a:t>
-            </a:r>
-            <a:r>
-              <a:rPr lang="en-US" sz="1500" b="1" dirty="0">
-                <a:solidFill>
-                  <a:srgbClr val="222B36"/>
-                </a:solidFill>
-                <a:latin typeface="Calibri" pitchFamily="34" charset="0"/>
-                <a:ea typeface="Calibri" pitchFamily="34" charset="-122"/>
-                <a:cs typeface="Calibri" pitchFamily="34" charset="-120"/>
-              </a:rPr>
-              <a:t>first sentence of your Conclusion</a:t>
-            </a:r>
-            <a:r>
-              <a:rPr lang="en-US" sz="1500" dirty="0">
-                <a:solidFill>
-                  <a:srgbClr val="222B36"/>
-                </a:solidFill>
-                <a:latin typeface="Calibri" pitchFamily="34" charset="0"/>
-                <a:ea typeface="Calibri" pitchFamily="34" charset="-122"/>
-                <a:cs typeface="Calibri" pitchFamily="34" charset="-120"/>
-              </a:rPr>
-              <a:t>: it must answer your question.</a:t>
-            </a:r>
-            <a:endParaRPr lang="en-US" sz="1500" dirty="0"/>
-          </a:p>
-        </p:txBody>
-      </p:sp>
-      <p:sp>
-        <p:nvSpPr>
-          <p:cNvPr id="17" name="num_150"/>
-          <p:cNvSpPr/>
-          <p:nvPr/>
-        </p:nvSpPr>
-        <p:spPr>
-          <a:xfrm>
-            <a:off x="594360" y="4379976"/>
-            <a:ext cx="365760" cy="365760"/>
-          </a:xfrm>
-          <a:prstGeom prst="ellipse">
-            <a:avLst/>
-          </a:prstGeom>
-          <a:solidFill>
-            <a:srgbClr val="D98E1F"/>
-          </a:solidFill>
-          <a:ln w="12700">
-            <a:solidFill>
-              <a:srgbClr val="D98E1F"/>
-            </a:solidFill>
-            <a:prstDash val="solid"/>
-          </a:ln>
-        </p:spPr>
-      </p:sp>
-      <p:sp>
-        <p:nvSpPr>
-          <p:cNvPr id="18" name="text_151"/>
-          <p:cNvSpPr txBox="1"/>
-          <p:nvPr/>
-        </p:nvSpPr>
-        <p:spPr>
-          <a:xfrm>
-            <a:off x="594360" y="4379976"/>
-            <a:ext cx="365760" cy="365760"/>
-          </a:xfrm>
-          <a:prstGeom prst="rect">
-            <a:avLst/>
-          </a:prstGeom>
-          <a:noFill/>
-          <a:ln/>
-        </p:spPr>
-        <p:txBody>
-          <a:bodyPr wrap="square" lIns="0" tIns="0" rIns="0" bIns="0" rtlCol="0" anchor="ctr"/>
-          <a:lstStyle/>
-          <a:p>
-            <a:pPr algn="ctr" indent="0" marL="0">
-              <a:lnSpc>
-                <a:spcPct val="100000"/>
-              </a:lnSpc>
-              <a:buNone/>
-            </a:pPr>
-            <a:r>
-              <a:rPr lang="en-US" sz="1200" b="1" dirty="0">
-                <a:solidFill>
-                  <a:srgbClr val="FFFFFF"/>
-                </a:solidFill>
-                <a:latin typeface="Calibri" pitchFamily="34" charset="0"/>
-                <a:ea typeface="Calibri" pitchFamily="34" charset="-122"/>
-                <a:cs typeface="Calibri" pitchFamily="34" charset="-120"/>
-              </a:rPr>
-              <a:t>5</a:t>
-            </a:r>
-            <a:endParaRPr lang="en-US" sz="1200" dirty="0"/>
-          </a:p>
-        </p:txBody>
-      </p:sp>
-      <p:sp>
-        <p:nvSpPr>
-          <p:cNvPr id="19" name="text_152"/>
-          <p:cNvSpPr txBox="1"/>
-          <p:nvPr/>
-        </p:nvSpPr>
-        <p:spPr>
-          <a:xfrm>
-            <a:off x="1097280" y="4361688"/>
-            <a:ext cx="6126480" cy="658368"/>
-          </a:xfrm>
-          <a:prstGeom prst="rect">
-            <a:avLst/>
-          </a:prstGeom>
-          <a:noFill/>
-          <a:ln/>
-        </p:spPr>
-        <p:txBody>
-          <a:bodyPr wrap="square" lIns="635" tIns="635" rIns="635" bIns="635" rtlCol="0" anchor="t"/>
-          <a:lstStyle/>
-          <a:p>
-            <a:pPr algn="l" indent="0" marL="0">
-              <a:lnSpc>
-                <a:spcPct val="100000"/>
-              </a:lnSpc>
-              <a:buNone/>
-            </a:pPr>
-            <a:r>
-              <a:rPr lang="en-US" sz="1500" dirty="0">
-                <a:solidFill>
-                  <a:srgbClr val="222B36"/>
-                </a:solidFill>
-                <a:latin typeface="Calibri" pitchFamily="34" charset="0"/>
-                <a:ea typeface="Calibri" pitchFamily="34" charset="-122"/>
-                <a:cs typeface="Calibri" pitchFamily="34" charset="-120"/>
-              </a:rPr>
-              <a:t>With a partner, run the </a:t>
-            </a:r>
-            <a:r>
-              <a:rPr lang="en-US" sz="1500" b="1" dirty="0">
-                <a:solidFill>
-                  <a:srgbClr val="222B36"/>
-                </a:solidFill>
-                <a:latin typeface="Calibri" pitchFamily="34" charset="0"/>
-                <a:ea typeface="Calibri" pitchFamily="34" charset="-122"/>
-                <a:cs typeface="Calibri" pitchFamily="34" charset="-120"/>
-              </a:rPr>
-              <a:t>mirror test</a:t>
-            </a:r>
-            <a:r>
-              <a:rPr lang="en-US" sz="1500" dirty="0">
-                <a:solidFill>
-                  <a:srgbClr val="222B36"/>
-                </a:solidFill>
-                <a:latin typeface="Calibri" pitchFamily="34" charset="0"/>
-                <a:ea typeface="Calibri" pitchFamily="34" charset="-122"/>
-                <a:cs typeface="Calibri" pitchFamily="34" charset="-120"/>
-              </a:rPr>
-              <a:t> on your purpose statement and that sentence.</a:t>
-            </a:r>
-            <a:endParaRPr lang="en-US" sz="1500" dirty="0"/>
-          </a:p>
-        </p:txBody>
-      </p:sp>
-      <p:sp>
-        <p:nvSpPr>
-          <p:cNvPr id="20" name="card_153"/>
-          <p:cNvSpPr/>
-          <p:nvPr/>
-        </p:nvSpPr>
-        <p:spPr>
-          <a:xfrm>
-            <a:off x="7680960" y="1417320"/>
-            <a:ext cx="3959352" cy="2331720"/>
-          </a:xfrm>
-          <a:prstGeom prst="roundRect">
-            <a:avLst>
-              <a:gd name="adj" fmla="val 3137"/>
-            </a:avLst>
-          </a:prstGeom>
-          <a:solidFill>
-            <a:srgbClr val="1B2A41"/>
-          </a:solidFill>
-          <a:ln w="9525">
-            <a:solidFill>
-              <a:srgbClr val="1B2A41"/>
-            </a:solidFill>
-            <a:prstDash val="solid"/>
-          </a:ln>
-        </p:spPr>
-      </p:sp>
-      <p:sp>
-        <p:nvSpPr>
-          <p:cNvPr id="21" name="tag_154"/>
-          <p:cNvSpPr/>
-          <p:nvPr/>
-        </p:nvSpPr>
-        <p:spPr>
-          <a:xfrm>
-            <a:off x="7845552" y="1545336"/>
-            <a:ext cx="1234440" cy="256032"/>
-          </a:xfrm>
-          <a:prstGeom prst="roundRect">
-            <a:avLst>
-              <a:gd name="adj" fmla="val 21429"/>
-            </a:avLst>
-          </a:prstGeom>
-          <a:solidFill>
-            <a:srgbClr val="D98E1F"/>
-          </a:solidFill>
-          <a:ln w="12700">
-            <a:solidFill>
-              <a:srgbClr val="D98E1F"/>
-            </a:solidFill>
-            <a:prstDash val="solid"/>
-          </a:ln>
-        </p:spPr>
-      </p:sp>
-      <p:sp>
-        <p:nvSpPr>
-          <p:cNvPr id="22" name="text_155"/>
-          <p:cNvSpPr txBox="1"/>
-          <p:nvPr/>
-        </p:nvSpPr>
-        <p:spPr>
-          <a:xfrm>
-            <a:off x="7845552" y="1545336"/>
-            <a:ext cx="1234440" cy="256032"/>
-          </a:xfrm>
-          <a:prstGeom prst="rect">
-            <a:avLst/>
-          </a:prstGeom>
-          <a:noFill/>
-          <a:ln/>
-        </p:spPr>
-        <p:txBody>
-          <a:bodyPr wrap="square" lIns="0" tIns="0" rIns="0" bIns="0" rtlCol="0" anchor="ctr"/>
-          <a:lstStyle/>
-          <a:p>
-            <a:pPr algn="ctr" indent="0" marL="0">
-              <a:lnSpc>
-                <a:spcPct val="100000"/>
-              </a:lnSpc>
-              <a:buNone/>
-            </a:pPr>
-            <a:r>
-              <a:rPr lang="en-US" sz="1050" b="1" dirty="0">
-                <a:solidFill>
-                  <a:srgbClr val="FFFFFF"/>
-                </a:solidFill>
-                <a:latin typeface="Calibri" pitchFamily="34" charset="0"/>
-                <a:ea typeface="Calibri" pitchFamily="34" charset="-122"/>
-                <a:cs typeface="Calibri" pitchFamily="34" charset="-120"/>
-              </a:rPr>
-              <a:t>YOU LEAVE WITH</a:t>
-            </a:r>
-            <a:endParaRPr lang="en-US" sz="1050" dirty="0"/>
-          </a:p>
-        </p:txBody>
-      </p:sp>
-      <p:sp>
-        <p:nvSpPr>
-          <p:cNvPr id="23" name="cardbody_156"/>
-          <p:cNvSpPr txBox="1"/>
-          <p:nvPr/>
-        </p:nvSpPr>
-        <p:spPr>
-          <a:xfrm>
-            <a:off x="7845552" y="1892808"/>
-            <a:ext cx="3630168" cy="1764792"/>
-          </a:xfrm>
-          <a:prstGeom prst="rect">
-            <a:avLst/>
-          </a:prstGeom>
-          <a:noFill/>
-          <a:ln/>
-        </p:spPr>
-        <p:txBody>
-          <a:bodyPr wrap="square" lIns="381" tIns="381" rIns="381" bIns="381" rtlCol="0" anchor="t"/>
-          <a:lstStyle/>
-          <a:p>
-            <a:pPr marL="342900" indent="-342900">
-              <a:spcAft>
-                <a:spcPts val="500"/>
-              </a:spcAft>
-              <a:buSzPct val="100000"/>
-              <a:buChar char="■"/>
-            </a:pPr>
-            <a:r>
-              <a:rPr lang="en-US" sz="1450" dirty="0">
-                <a:solidFill>
-                  <a:srgbClr val="FFFFFF"/>
-                </a:solidFill>
-                <a:latin typeface="Calibri" pitchFamily="34" charset="0"/>
-                <a:ea typeface="Calibri" pitchFamily="34" charset="-122"/>
-                <a:cs typeface="Calibri" pitchFamily="34" charset="-120"/>
-              </a:rPr>
-              <a:t>Discussion topic sentences + one strong limitation</a:t>
-            </a:r>
-            <a:endParaRPr lang="en-US" sz="1450" dirty="0"/>
-          </a:p>
-          <a:p>
-            <a:pPr marL="342900" indent="-342900">
-              <a:spcAft>
-                <a:spcPts val="500"/>
-              </a:spcAft>
-              <a:buSzPct val="100000"/>
-              <a:buChar char="■"/>
-            </a:pPr>
-            <a:r>
-              <a:rPr lang="en-US" sz="1450" dirty="0">
-                <a:solidFill>
-                  <a:srgbClr val="FFFFFF"/>
-                </a:solidFill>
-                <a:latin typeface="Calibri" pitchFamily="34" charset="0"/>
-                <a:ea typeface="Calibri" pitchFamily="34" charset="-122"/>
-                <a:cs typeface="Calibri" pitchFamily="34" charset="-120"/>
-              </a:rPr>
-              <a:t>Conclusion sentence 1, mirror-tested</a:t>
-            </a:r>
-            <a:endParaRPr lang="en-US" sz="1450" dirty="0"/>
-          </a:p>
-          <a:p>
-            <a:pPr marL="342900" indent="-342900">
-              <a:spcAft>
-                <a:spcPts val="500"/>
-              </a:spcAft>
-              <a:buSzPct val="100000"/>
-              <a:buChar char="■"/>
-            </a:pPr>
-            <a:r>
-              <a:rPr lang="en-US" sz="1450" dirty="0">
-                <a:solidFill>
-                  <a:srgbClr val="FFFFFF"/>
-                </a:solidFill>
-                <a:latin typeface="Calibri" pitchFamily="34" charset="0"/>
-                <a:ea typeface="Calibri" pitchFamily="34" charset="-122"/>
-                <a:cs typeface="Calibri" pitchFamily="34" charset="-120"/>
-              </a:rPr>
-              <a:t>Everything you need to finish the draft by next week</a:t>
-            </a:r>
-            <a:endParaRPr lang="en-US" sz="1450" dirty="0"/>
-          </a:p>
-        </p:txBody>
-      </p:sp>
-      <p:sp>
-        <p:nvSpPr>
-          <p:cNvPr id="24" name="card_157"/>
-          <p:cNvSpPr/>
-          <p:nvPr/>
-        </p:nvSpPr>
-        <p:spPr>
-          <a:xfrm>
-            <a:off x="7680960" y="3931920"/>
-            <a:ext cx="3959352" cy="2377440"/>
-          </a:xfrm>
-          <a:prstGeom prst="roundRect">
-            <a:avLst>
-              <a:gd name="adj" fmla="val 3077"/>
-            </a:avLst>
-          </a:prstGeom>
-          <a:solidFill>
-            <a:srgbClr val="DCE7F2"/>
-          </a:solidFill>
-          <a:ln w="9525">
-            <a:solidFill>
-              <a:srgbClr val="DCE7F2"/>
-            </a:solidFill>
-            <a:prstDash val="solid"/>
-          </a:ln>
-        </p:spPr>
-      </p:sp>
-      <p:sp>
-        <p:nvSpPr>
-          <p:cNvPr id="25" name="tag_158"/>
-          <p:cNvSpPr/>
-          <p:nvPr/>
-        </p:nvSpPr>
-        <p:spPr>
-          <a:xfrm>
-            <a:off x="7845552" y="4059936"/>
-            <a:ext cx="923544" cy="256032"/>
-          </a:xfrm>
-          <a:prstGeom prst="roundRect">
-            <a:avLst>
-              <a:gd name="adj" fmla="val 21429"/>
-            </a:avLst>
-          </a:prstGeom>
-          <a:solidFill>
-            <a:srgbClr val="2E4A6B"/>
-          </a:solidFill>
-          <a:ln w="12700">
-            <a:solidFill>
-              <a:srgbClr val="2E4A6B"/>
-            </a:solidFill>
-            <a:prstDash val="solid"/>
-          </a:ln>
-        </p:spPr>
-      </p:sp>
-      <p:sp>
-        <p:nvSpPr>
-          <p:cNvPr id="26" name="text_159"/>
-          <p:cNvSpPr txBox="1"/>
-          <p:nvPr/>
-        </p:nvSpPr>
-        <p:spPr>
-          <a:xfrm>
-            <a:off x="7845552" y="4059936"/>
-            <a:ext cx="923544" cy="256032"/>
-          </a:xfrm>
-          <a:prstGeom prst="rect">
-            <a:avLst/>
-          </a:prstGeom>
-          <a:noFill/>
-          <a:ln/>
-        </p:spPr>
-        <p:txBody>
-          <a:bodyPr wrap="square" lIns="0" tIns="0" rIns="0" bIns="0" rtlCol="0" anchor="ctr"/>
-          <a:lstStyle/>
-          <a:p>
-            <a:pPr algn="ctr" indent="0" marL="0">
-              <a:lnSpc>
-                <a:spcPct val="100000"/>
-              </a:lnSpc>
-              <a:buNone/>
-            </a:pPr>
-            <a:r>
-              <a:rPr lang="en-US" sz="1050" b="1" dirty="0">
-                <a:solidFill>
-                  <a:srgbClr val="FFFFFF"/>
-                </a:solidFill>
-                <a:latin typeface="Calibri" pitchFamily="34" charset="0"/>
-                <a:ea typeface="Calibri" pitchFamily="34" charset="-122"/>
-                <a:cs typeface="Calibri" pitchFamily="34" charset="-120"/>
-              </a:rPr>
-              <a:t>PAIR CHECK</a:t>
-            </a:r>
-            <a:endParaRPr lang="en-US" sz="1050" dirty="0"/>
-          </a:p>
-        </p:txBody>
-      </p:sp>
-      <p:sp>
-        <p:nvSpPr>
-          <p:cNvPr id="27" name="cardbody_160"/>
-          <p:cNvSpPr txBox="1"/>
-          <p:nvPr/>
-        </p:nvSpPr>
-        <p:spPr>
-          <a:xfrm>
-            <a:off x="7845552" y="4407408"/>
-            <a:ext cx="3630168" cy="1810512"/>
-          </a:xfrm>
-          <a:prstGeom prst="rect">
-            <a:avLst/>
-          </a:prstGeom>
-          <a:noFill/>
-          <a:ln/>
-        </p:spPr>
-        <p:txBody>
-          <a:bodyPr wrap="square" lIns="381" tIns="381" rIns="381" bIns="381" rtlCol="0" anchor="t"/>
-          <a:lstStyle/>
-          <a:p>
-            <a:pPr marL="342900" indent="-342900">
-              <a:spcAft>
-                <a:spcPts val="500"/>
-              </a:spcAft>
-              <a:buSzPct val="100000"/>
-              <a:buChar char="■"/>
-            </a:pPr>
-            <a:r>
-              <a:rPr lang="en-US" sz="1400" dirty="0">
-                <a:solidFill>
-                  <a:srgbClr val="222B36"/>
-                </a:solidFill>
-                <a:latin typeface="Calibri" pitchFamily="34" charset="0"/>
-                <a:ea typeface="Calibri" pitchFamily="34" charset="-122"/>
-                <a:cs typeface="Calibri" pitchFamily="34" charset="-120"/>
-              </a:rPr>
-              <a:t>Is the EXPLAIN paragraph a </a:t>
-            </a:r>
-            <a:r>
-              <a:rPr lang="en-US" sz="1400" b="1" dirty="0">
-                <a:solidFill>
-                  <a:srgbClr val="222B36"/>
-                </a:solidFill>
-                <a:latin typeface="Calibri" pitchFamily="34" charset="0"/>
-                <a:ea typeface="Calibri" pitchFamily="34" charset="-122"/>
-                <a:cs typeface="Calibri" pitchFamily="34" charset="-120"/>
-              </a:rPr>
-              <a:t>mechanism</a:t>
-            </a:r>
-            <a:r>
-              <a:rPr lang="en-US" sz="1400" dirty="0">
-                <a:solidFill>
-                  <a:srgbClr val="222B36"/>
-                </a:solidFill>
-                <a:latin typeface="Calibri" pitchFamily="34" charset="0"/>
-                <a:ea typeface="Calibri" pitchFamily="34" charset="-122"/>
-                <a:cs typeface="Calibri" pitchFamily="34" charset="-120"/>
-              </a:rPr>
-              <a:t>, or just ‘ENSO affects…’?</a:t>
-            </a:r>
-            <a:endParaRPr lang="en-US" sz="1400" dirty="0"/>
-          </a:p>
-          <a:p>
-            <a:pPr marL="342900" indent="-342900">
-              <a:spcAft>
-                <a:spcPts val="500"/>
-              </a:spcAft>
-              <a:buSzPct val="100000"/>
-              <a:buChar char="■"/>
-            </a:pPr>
-            <a:r>
-              <a:rPr lang="en-US" sz="1400" dirty="0">
-                <a:solidFill>
-                  <a:srgbClr val="222B36"/>
-                </a:solidFill>
-                <a:latin typeface="Calibri" pitchFamily="34" charset="0"/>
-                <a:ea typeface="Calibri" pitchFamily="34" charset="-122"/>
-                <a:cs typeface="Calibri" pitchFamily="34" charset="-120"/>
-              </a:rPr>
-              <a:t>Is the limitation tied to its </a:t>
-            </a:r>
-            <a:r>
-              <a:rPr lang="en-US" sz="1400" b="1" dirty="0">
-                <a:solidFill>
-                  <a:srgbClr val="222B36"/>
-                </a:solidFill>
-                <a:latin typeface="Calibri" pitchFamily="34" charset="0"/>
-                <a:ea typeface="Calibri" pitchFamily="34" charset="-122"/>
-                <a:cs typeface="Calibri" pitchFamily="34" charset="-120"/>
-              </a:rPr>
-              <a:t>effect on the answer</a:t>
-            </a:r>
-            <a:r>
-              <a:rPr lang="en-US" sz="1400" dirty="0">
-                <a:solidFill>
-                  <a:srgbClr val="222B36"/>
-                </a:solidFill>
-                <a:latin typeface="Calibri" pitchFamily="34" charset="0"/>
-                <a:ea typeface="Calibri" pitchFamily="34" charset="-122"/>
-                <a:cs typeface="Calibri" pitchFamily="34" charset="-120"/>
-              </a:rPr>
-              <a:t>?</a:t>
-            </a:r>
-            <a:endParaRPr lang="en-US" sz="1400" dirty="0"/>
-          </a:p>
-          <a:p>
-            <a:pPr marL="342900" indent="-342900">
-              <a:spcAft>
-                <a:spcPts val="500"/>
-              </a:spcAft>
-              <a:buSzPct val="100000"/>
-              <a:buChar char="■"/>
-            </a:pPr>
-            <a:r>
-              <a:rPr lang="en-US" sz="1400" dirty="0">
-                <a:solidFill>
-                  <a:srgbClr val="222B36"/>
-                </a:solidFill>
-                <a:latin typeface="Calibri" pitchFamily="34" charset="0"/>
-                <a:ea typeface="Calibri" pitchFamily="34" charset="-122"/>
-                <a:cs typeface="Calibri" pitchFamily="34" charset="-120"/>
-              </a:rPr>
-              <a:t>Mirror test: same question, same tags?</a:t>
-            </a:r>
-            <a:endParaRPr lang="en-US" sz="1400" dirty="0"/>
+              <a:rPr lang="en-US" sz="900" i="1" dirty="0">
+                <a:solidFill>
+                  <a:srgbClr val="8A93A0"/>
+                </a:solidFill>
+                <a:latin typeface="Calibri" pitchFamily="34" charset="0"/>
+                <a:ea typeface="Calibri" pitchFamily="34" charset="-122"/>
+                <a:cs typeface="Calibri" pitchFamily="34" charset="-120"/>
+              </a:rPr>
+              <a:t>Source: Schultz, D. M. (2009) Eloquent Science, American Meteorological Society, §4.11; final checks sidebar in §13.6 (abstract and conclusions consistent).</a:t>
+            </a:r>
+            <a:endParaRPr lang="en-US" sz="900" dirty="0"/>
           </a:p>
         </p:txBody>
       </p:sp>
@@ -3857,14 +3432,39 @@
       </p:grpSpPr>
       <p:sp>
         <p:nvSpPr>
-          <p:cNvPr id="2" name="text_161"/>
+          <p:cNvPr id="2" name="actband_148"/>
+          <p:cNvSpPr/>
+          <p:nvPr/>
+        </p:nvSpPr>
+        <p:spPr>
+          <a:xfrm>
+            <a:off x="0" y="237744"/>
+            <a:ext cx="12191695" cy="914400"/>
+          </a:xfrm>
+          <a:prstGeom prst="rect">
+            <a:avLst/>
+          </a:prstGeom>
+          <a:solidFill>
+            <a:srgbClr val="FBEBD0"/>
+          </a:solidFill>
+          <a:ln w="12700">
+            <a:solidFill>
+              <a:srgbClr val="FBEBD0"/>
+            </a:solidFill>
+            <a:prstDash val="solid"/>
+          </a:ln>
+        </p:spPr>
+      </p:sp>
+      <p:sp>
+        <p:nvSpPr>
+          <p:cNvPr id="3" name="text_149"/>
           <p:cNvSpPr txBox="1"/>
           <p:nvPr/>
         </p:nvSpPr>
         <p:spPr>
           <a:xfrm>
-            <a:off x="548640" y="365760"/>
-            <a:ext cx="11064240" cy="640080"/>
+            <a:off x="548640" y="329184"/>
+            <a:ext cx="5486400" cy="274320"/>
           </a:xfrm>
           <a:prstGeom prst="rect">
             <a:avLst/>
@@ -3873,7 +3473,7 @@
           <a:ln/>
         </p:spPr>
         <p:txBody>
-          <a:bodyPr wrap="square" lIns="635" tIns="635" rIns="635" bIns="635" rtlCol="0" anchor="b"/>
+          <a:bodyPr wrap="square" lIns="635" tIns="635" rIns="635" bIns="635" rtlCol="0" anchor="t"/>
           <a:lstStyle/>
           <a:p>
             <a:pPr algn="l" indent="0" marL="0">
@@ -3883,30 +3483,30 @@
               <a:buNone/>
             </a:pPr>
             <a:r>
-              <a:rPr lang="en-US" sz="2800" b="1" dirty="0">
-                <a:solidFill>
-                  <a:srgbClr val="1B2A41"/>
-                </a:solidFill>
-                <a:latin typeface="Georgia" pitchFamily="34" charset="0"/>
-                <a:ea typeface="Georgia" pitchFamily="34" charset="-122"/>
-                <a:cs typeface="Georgia" pitchFamily="34" charset="-120"/>
-              </a:rPr>
-              <a:t>Before Tutorial 8  ·  Thu 3 Dec</a:t>
-            </a:r>
-            <a:endParaRPr lang="en-US" sz="2800" dirty="0"/>
-          </a:p>
-        </p:txBody>
-      </p:sp>
-      <p:sp>
-        <p:nvSpPr>
-          <p:cNvPr id="3" name="text_162"/>
+              <a:rPr lang="en-US" sz="1100" b="1" dirty="0">
+                <a:solidFill>
+                  <a:srgbClr val="D98E1F"/>
+                </a:solidFill>
+                <a:latin typeface="Calibri" pitchFamily="34" charset="0"/>
+                <a:ea typeface="Calibri" pitchFamily="34" charset="-122"/>
+                <a:cs typeface="Calibri" pitchFamily="34" charset="-120"/>
+              </a:rPr>
+              <a:t>IN-CLASS ACTIVITY  ·  16 MIN</a:t>
+            </a:r>
+            <a:endParaRPr lang="en-US" sz="1100" dirty="0"/>
+          </a:p>
+        </p:txBody>
+      </p:sp>
+      <p:sp>
+        <p:nvSpPr>
+          <p:cNvPr id="4" name="text_150"/>
           <p:cNvSpPr txBox="1"/>
           <p:nvPr/>
         </p:nvSpPr>
         <p:spPr>
           <a:xfrm>
-            <a:off x="548640" y="1188720"/>
-            <a:ext cx="11064240" cy="411480"/>
+            <a:off x="548640" y="548640"/>
+            <a:ext cx="11064240" cy="548640"/>
           </a:xfrm>
           <a:prstGeom prst="rect">
             <a:avLst/>
@@ -3925,6 +3525,1224 @@
               <a:buNone/>
             </a:pPr>
             <a:r>
+              <a:rPr lang="en-US" sz="2600" b="1" dirty="0">
+                <a:solidFill>
+                  <a:srgbClr val="1B2A41"/>
+                </a:solidFill>
+                <a:latin typeface="Georgia" pitchFamily="34" charset="0"/>
+                <a:ea typeface="Georgia" pitchFamily="34" charset="-122"/>
+                <a:cs typeface="Georgia" pitchFamily="34" charset="-120"/>
+              </a:rPr>
+              <a:t>Plan the Discussion, draft the landing</a:t>
+            </a:r>
+            <a:endParaRPr lang="en-US" sz="2600" dirty="0"/>
+          </a:p>
+        </p:txBody>
+      </p:sp>
+      <p:sp>
+        <p:nvSpPr>
+          <p:cNvPr id="5" name="num_151"/>
+          <p:cNvSpPr/>
+          <p:nvPr/>
+        </p:nvSpPr>
+        <p:spPr>
+          <a:xfrm>
+            <a:off x="594360" y="1435608"/>
+            <a:ext cx="365760" cy="365760"/>
+          </a:xfrm>
+          <a:prstGeom prst="ellipse">
+            <a:avLst/>
+          </a:prstGeom>
+          <a:solidFill>
+            <a:srgbClr val="D98E1F"/>
+          </a:solidFill>
+          <a:ln w="12700">
+            <a:solidFill>
+              <a:srgbClr val="D98E1F"/>
+            </a:solidFill>
+            <a:prstDash val="solid"/>
+          </a:ln>
+        </p:spPr>
+      </p:sp>
+      <p:sp>
+        <p:nvSpPr>
+          <p:cNvPr id="6" name="text_152"/>
+          <p:cNvSpPr txBox="1"/>
+          <p:nvPr/>
+        </p:nvSpPr>
+        <p:spPr>
+          <a:xfrm>
+            <a:off x="594360" y="1435608"/>
+            <a:ext cx="365760" cy="365760"/>
+          </a:xfrm>
+          <a:prstGeom prst="rect">
+            <a:avLst/>
+          </a:prstGeom>
+          <a:noFill/>
+          <a:ln/>
+        </p:spPr>
+        <p:txBody>
+          <a:bodyPr wrap="square" lIns="0" tIns="0" rIns="0" bIns="0" rtlCol="0" anchor="ctr"/>
+          <a:lstStyle/>
+          <a:p>
+            <a:pPr algn="ctr" indent="0" marL="0">
+              <a:lnSpc>
+                <a:spcPct val="100000"/>
+              </a:lnSpc>
+              <a:buNone/>
+            </a:pPr>
+            <a:r>
+              <a:rPr lang="en-US" sz="1200" b="1" dirty="0">
+                <a:solidFill>
+                  <a:srgbClr val="FFFFFF"/>
+                </a:solidFill>
+                <a:latin typeface="Calibri" pitchFamily="34" charset="0"/>
+                <a:ea typeface="Calibri" pitchFamily="34" charset="-122"/>
+                <a:cs typeface="Calibri" pitchFamily="34" charset="-120"/>
+              </a:rPr>
+              <a:t>1</a:t>
+            </a:r>
+            <a:endParaRPr lang="en-US" sz="1200" dirty="0"/>
+          </a:p>
+        </p:txBody>
+      </p:sp>
+      <p:sp>
+        <p:nvSpPr>
+          <p:cNvPr id="7" name="text_153"/>
+          <p:cNvSpPr txBox="1"/>
+          <p:nvPr/>
+        </p:nvSpPr>
+        <p:spPr>
+          <a:xfrm>
+            <a:off x="1097280" y="1417320"/>
+            <a:ext cx="6126480" cy="658368"/>
+          </a:xfrm>
+          <a:prstGeom prst="rect">
+            <a:avLst/>
+          </a:prstGeom>
+          <a:noFill/>
+          <a:ln/>
+        </p:spPr>
+        <p:txBody>
+          <a:bodyPr wrap="square" lIns="635" tIns="635" rIns="635" bIns="635" rtlCol="0" anchor="t"/>
+          <a:lstStyle/>
+          <a:p>
+            <a:pPr algn="l" indent="0" marL="0">
+              <a:lnSpc>
+                <a:spcPct val="100000"/>
+              </a:lnSpc>
+              <a:buNone/>
+            </a:pPr>
+            <a:r>
+              <a:rPr lang="en-US" sz="1500" dirty="0">
+                <a:solidFill>
+                  <a:srgbClr val="222B36"/>
+                </a:solidFill>
+                <a:latin typeface="Calibri" pitchFamily="34" charset="0"/>
+                <a:ea typeface="Calibri" pitchFamily="34" charset="-122"/>
+                <a:cs typeface="Calibri" pitchFamily="34" charset="-120"/>
+              </a:rPr>
+              <a:t>From your parking lot and brainstorm, choose </a:t>
+            </a:r>
+            <a:r>
+              <a:rPr lang="en-US" sz="1500" b="1" dirty="0">
+                <a:solidFill>
+                  <a:srgbClr val="222B36"/>
+                </a:solidFill>
+                <a:latin typeface="Calibri" pitchFamily="34" charset="0"/>
+                <a:ea typeface="Calibri" pitchFamily="34" charset="-122"/>
+                <a:cs typeface="Calibri" pitchFamily="34" charset="-120"/>
+              </a:rPr>
+              <a:t>3–4 moves</a:t>
+            </a:r>
+            <a:r>
+              <a:rPr lang="en-US" sz="1500" dirty="0">
+                <a:solidFill>
+                  <a:srgbClr val="222B36"/>
+                </a:solidFill>
+                <a:latin typeface="Calibri" pitchFamily="34" charset="0"/>
+                <a:ea typeface="Calibri" pitchFamily="34" charset="-122"/>
+                <a:cs typeface="Calibri" pitchFamily="34" charset="-120"/>
+              </a:rPr>
+              <a:t> from the menu. EXPLAIN and BACK TO THE QUESTION are compulsory.</a:t>
+            </a:r>
+            <a:endParaRPr lang="en-US" sz="1500" dirty="0"/>
+          </a:p>
+        </p:txBody>
+      </p:sp>
+      <p:sp>
+        <p:nvSpPr>
+          <p:cNvPr id="8" name="num_154"/>
+          <p:cNvSpPr/>
+          <p:nvPr/>
+        </p:nvSpPr>
+        <p:spPr>
+          <a:xfrm>
+            <a:off x="594360" y="2221992"/>
+            <a:ext cx="365760" cy="365760"/>
+          </a:xfrm>
+          <a:prstGeom prst="ellipse">
+            <a:avLst/>
+          </a:prstGeom>
+          <a:solidFill>
+            <a:srgbClr val="D98E1F"/>
+          </a:solidFill>
+          <a:ln w="12700">
+            <a:solidFill>
+              <a:srgbClr val="D98E1F"/>
+            </a:solidFill>
+            <a:prstDash val="solid"/>
+          </a:ln>
+        </p:spPr>
+      </p:sp>
+      <p:sp>
+        <p:nvSpPr>
+          <p:cNvPr id="9" name="text_155"/>
+          <p:cNvSpPr txBox="1"/>
+          <p:nvPr/>
+        </p:nvSpPr>
+        <p:spPr>
+          <a:xfrm>
+            <a:off x="594360" y="2221992"/>
+            <a:ext cx="365760" cy="365760"/>
+          </a:xfrm>
+          <a:prstGeom prst="rect">
+            <a:avLst/>
+          </a:prstGeom>
+          <a:noFill/>
+          <a:ln/>
+        </p:spPr>
+        <p:txBody>
+          <a:bodyPr wrap="square" lIns="0" tIns="0" rIns="0" bIns="0" rtlCol="0" anchor="ctr"/>
+          <a:lstStyle/>
+          <a:p>
+            <a:pPr algn="ctr" indent="0" marL="0">
+              <a:lnSpc>
+                <a:spcPct val="100000"/>
+              </a:lnSpc>
+              <a:buNone/>
+            </a:pPr>
+            <a:r>
+              <a:rPr lang="en-US" sz="1200" b="1" dirty="0">
+                <a:solidFill>
+                  <a:srgbClr val="FFFFFF"/>
+                </a:solidFill>
+                <a:latin typeface="Calibri" pitchFamily="34" charset="0"/>
+                <a:ea typeface="Calibri" pitchFamily="34" charset="-122"/>
+                <a:cs typeface="Calibri" pitchFamily="34" charset="-120"/>
+              </a:rPr>
+              <a:t>2</a:t>
+            </a:r>
+            <a:endParaRPr lang="en-US" sz="1200" dirty="0"/>
+          </a:p>
+        </p:txBody>
+      </p:sp>
+      <p:sp>
+        <p:nvSpPr>
+          <p:cNvPr id="10" name="text_156"/>
+          <p:cNvSpPr txBox="1"/>
+          <p:nvPr/>
+        </p:nvSpPr>
+        <p:spPr>
+          <a:xfrm>
+            <a:off x="1097280" y="2203704"/>
+            <a:ext cx="6126480" cy="457200"/>
+          </a:xfrm>
+          <a:prstGeom prst="rect">
+            <a:avLst/>
+          </a:prstGeom>
+          <a:noFill/>
+          <a:ln/>
+        </p:spPr>
+        <p:txBody>
+          <a:bodyPr wrap="square" lIns="635" tIns="635" rIns="635" bIns="635" rtlCol="0" anchor="t"/>
+          <a:lstStyle/>
+          <a:p>
+            <a:pPr algn="l" indent="0" marL="0">
+              <a:lnSpc>
+                <a:spcPct val="100000"/>
+              </a:lnSpc>
+              <a:buNone/>
+            </a:pPr>
+            <a:r>
+              <a:rPr lang="en-US" sz="1500" dirty="0">
+                <a:solidFill>
+                  <a:srgbClr val="222B36"/>
+                </a:solidFill>
+                <a:latin typeface="Calibri" pitchFamily="34" charset="0"/>
+                <a:ea typeface="Calibri" pitchFamily="34" charset="-122"/>
+                <a:cs typeface="Calibri" pitchFamily="34" charset="-120"/>
+              </a:rPr>
+              <a:t>Write the </a:t>
+            </a:r>
+            <a:r>
+              <a:rPr lang="en-US" sz="1500" b="1" dirty="0">
+                <a:solidFill>
+                  <a:srgbClr val="222B36"/>
+                </a:solidFill>
+                <a:latin typeface="Calibri" pitchFamily="34" charset="0"/>
+                <a:ea typeface="Calibri" pitchFamily="34" charset="-122"/>
+                <a:cs typeface="Calibri" pitchFamily="34" charset="-120"/>
+              </a:rPr>
+              <a:t>topic sentence</a:t>
+            </a:r>
+            <a:r>
+              <a:rPr lang="en-US" sz="1500" dirty="0">
+                <a:solidFill>
+                  <a:srgbClr val="222B36"/>
+                </a:solidFill>
+                <a:latin typeface="Calibri" pitchFamily="34" charset="0"/>
+                <a:ea typeface="Calibri" pitchFamily="34" charset="-122"/>
+                <a:cs typeface="Calibri" pitchFamily="34" charset="-120"/>
+              </a:rPr>
+              <a:t> for each Discussion paragraph.</a:t>
+            </a:r>
+            <a:endParaRPr lang="en-US" sz="1500" dirty="0"/>
+          </a:p>
+        </p:txBody>
+      </p:sp>
+      <p:sp>
+        <p:nvSpPr>
+          <p:cNvPr id="11" name="num_157"/>
+          <p:cNvSpPr/>
+          <p:nvPr/>
+        </p:nvSpPr>
+        <p:spPr>
+          <a:xfrm>
+            <a:off x="594360" y="2807208"/>
+            <a:ext cx="365760" cy="365760"/>
+          </a:xfrm>
+          <a:prstGeom prst="ellipse">
+            <a:avLst/>
+          </a:prstGeom>
+          <a:solidFill>
+            <a:srgbClr val="D98E1F"/>
+          </a:solidFill>
+          <a:ln w="12700">
+            <a:solidFill>
+              <a:srgbClr val="D98E1F"/>
+            </a:solidFill>
+            <a:prstDash val="solid"/>
+          </a:ln>
+        </p:spPr>
+      </p:sp>
+      <p:sp>
+        <p:nvSpPr>
+          <p:cNvPr id="12" name="text_158"/>
+          <p:cNvSpPr txBox="1"/>
+          <p:nvPr/>
+        </p:nvSpPr>
+        <p:spPr>
+          <a:xfrm>
+            <a:off x="594360" y="2807208"/>
+            <a:ext cx="365760" cy="365760"/>
+          </a:xfrm>
+          <a:prstGeom prst="rect">
+            <a:avLst/>
+          </a:prstGeom>
+          <a:noFill/>
+          <a:ln/>
+        </p:spPr>
+        <p:txBody>
+          <a:bodyPr wrap="square" lIns="0" tIns="0" rIns="0" bIns="0" rtlCol="0" anchor="ctr"/>
+          <a:lstStyle/>
+          <a:p>
+            <a:pPr algn="ctr" indent="0" marL="0">
+              <a:lnSpc>
+                <a:spcPct val="100000"/>
+              </a:lnSpc>
+              <a:buNone/>
+            </a:pPr>
+            <a:r>
+              <a:rPr lang="en-US" sz="1200" b="1" dirty="0">
+                <a:solidFill>
+                  <a:srgbClr val="FFFFFF"/>
+                </a:solidFill>
+                <a:latin typeface="Calibri" pitchFamily="34" charset="0"/>
+                <a:ea typeface="Calibri" pitchFamily="34" charset="-122"/>
+                <a:cs typeface="Calibri" pitchFamily="34" charset="-120"/>
+              </a:rPr>
+              <a:t>3</a:t>
+            </a:r>
+            <a:endParaRPr lang="en-US" sz="1200" dirty="0"/>
+          </a:p>
+        </p:txBody>
+      </p:sp>
+      <p:sp>
+        <p:nvSpPr>
+          <p:cNvPr id="13" name="text_159"/>
+          <p:cNvSpPr txBox="1"/>
+          <p:nvPr/>
+        </p:nvSpPr>
+        <p:spPr>
+          <a:xfrm>
+            <a:off x="1097280" y="2788920"/>
+            <a:ext cx="6126480" cy="658368"/>
+          </a:xfrm>
+          <a:prstGeom prst="rect">
+            <a:avLst/>
+          </a:prstGeom>
+          <a:noFill/>
+          <a:ln/>
+        </p:spPr>
+        <p:txBody>
+          <a:bodyPr wrap="square" lIns="635" tIns="635" rIns="635" bIns="635" rtlCol="0" anchor="t"/>
+          <a:lstStyle/>
+          <a:p>
+            <a:pPr algn="l" indent="0" marL="0">
+              <a:lnSpc>
+                <a:spcPct val="100000"/>
+              </a:lnSpc>
+              <a:buNone/>
+            </a:pPr>
+            <a:r>
+              <a:rPr lang="en-US" sz="1500" dirty="0">
+                <a:solidFill>
+                  <a:srgbClr val="222B36"/>
+                </a:solidFill>
+                <a:latin typeface="Calibri" pitchFamily="34" charset="0"/>
+                <a:ea typeface="Calibri" pitchFamily="34" charset="-122"/>
+                <a:cs typeface="Calibri" pitchFamily="34" charset="-120"/>
+              </a:rPr>
+              <a:t>For your best limitation, write it the ‘strong’ way: </a:t>
+            </a:r>
+            <a:r>
+              <a:rPr lang="en-US" sz="1500" b="1" dirty="0">
+                <a:solidFill>
+                  <a:srgbClr val="222B36"/>
+                </a:solidFill>
+                <a:latin typeface="Calibri" pitchFamily="34" charset="0"/>
+                <a:ea typeface="Calibri" pitchFamily="34" charset="-122"/>
+                <a:cs typeface="Calibri" pitchFamily="34" charset="-120"/>
+              </a:rPr>
+              <a:t>what, how much, effect on the answer, a check</a:t>
+            </a:r>
+            <a:r>
+              <a:rPr lang="en-US" sz="1500" dirty="0">
+                <a:solidFill>
+                  <a:srgbClr val="222B36"/>
+                </a:solidFill>
+                <a:latin typeface="Calibri" pitchFamily="34" charset="0"/>
+                <a:ea typeface="Calibri" pitchFamily="34" charset="-122"/>
+                <a:cs typeface="Calibri" pitchFamily="34" charset="-120"/>
+              </a:rPr>
+              <a:t>.</a:t>
+            </a:r>
+            <a:endParaRPr lang="en-US" sz="1500" dirty="0"/>
+          </a:p>
+        </p:txBody>
+      </p:sp>
+      <p:sp>
+        <p:nvSpPr>
+          <p:cNvPr id="14" name="num_160"/>
+          <p:cNvSpPr/>
+          <p:nvPr/>
+        </p:nvSpPr>
+        <p:spPr>
+          <a:xfrm>
+            <a:off x="594360" y="3593592"/>
+            <a:ext cx="365760" cy="365760"/>
+          </a:xfrm>
+          <a:prstGeom prst="ellipse">
+            <a:avLst/>
+          </a:prstGeom>
+          <a:solidFill>
+            <a:srgbClr val="D98E1F"/>
+          </a:solidFill>
+          <a:ln w="12700">
+            <a:solidFill>
+              <a:srgbClr val="D98E1F"/>
+            </a:solidFill>
+            <a:prstDash val="solid"/>
+          </a:ln>
+        </p:spPr>
+      </p:sp>
+      <p:sp>
+        <p:nvSpPr>
+          <p:cNvPr id="15" name="text_161"/>
+          <p:cNvSpPr txBox="1"/>
+          <p:nvPr/>
+        </p:nvSpPr>
+        <p:spPr>
+          <a:xfrm>
+            <a:off x="594360" y="3593592"/>
+            <a:ext cx="365760" cy="365760"/>
+          </a:xfrm>
+          <a:prstGeom prst="rect">
+            <a:avLst/>
+          </a:prstGeom>
+          <a:noFill/>
+          <a:ln/>
+        </p:spPr>
+        <p:txBody>
+          <a:bodyPr wrap="square" lIns="0" tIns="0" rIns="0" bIns="0" rtlCol="0" anchor="ctr"/>
+          <a:lstStyle/>
+          <a:p>
+            <a:pPr algn="ctr" indent="0" marL="0">
+              <a:lnSpc>
+                <a:spcPct val="100000"/>
+              </a:lnSpc>
+              <a:buNone/>
+            </a:pPr>
+            <a:r>
+              <a:rPr lang="en-US" sz="1200" b="1" dirty="0">
+                <a:solidFill>
+                  <a:srgbClr val="FFFFFF"/>
+                </a:solidFill>
+                <a:latin typeface="Calibri" pitchFamily="34" charset="0"/>
+                <a:ea typeface="Calibri" pitchFamily="34" charset="-122"/>
+                <a:cs typeface="Calibri" pitchFamily="34" charset="-120"/>
+              </a:rPr>
+              <a:t>4</a:t>
+            </a:r>
+            <a:endParaRPr lang="en-US" sz="1200" dirty="0"/>
+          </a:p>
+        </p:txBody>
+      </p:sp>
+      <p:sp>
+        <p:nvSpPr>
+          <p:cNvPr id="16" name="text_162"/>
+          <p:cNvSpPr txBox="1"/>
+          <p:nvPr/>
+        </p:nvSpPr>
+        <p:spPr>
+          <a:xfrm>
+            <a:off x="1097280" y="3575304"/>
+            <a:ext cx="6126480" cy="658368"/>
+          </a:xfrm>
+          <a:prstGeom prst="rect">
+            <a:avLst/>
+          </a:prstGeom>
+          <a:noFill/>
+          <a:ln/>
+        </p:spPr>
+        <p:txBody>
+          <a:bodyPr wrap="square" lIns="635" tIns="635" rIns="635" bIns="635" rtlCol="0" anchor="t"/>
+          <a:lstStyle/>
+          <a:p>
+            <a:pPr algn="l" indent="0" marL="0">
+              <a:lnSpc>
+                <a:spcPct val="100000"/>
+              </a:lnSpc>
+              <a:buNone/>
+            </a:pPr>
+            <a:r>
+              <a:rPr lang="en-US" sz="1500" dirty="0">
+                <a:solidFill>
+                  <a:srgbClr val="222B36"/>
+                </a:solidFill>
+                <a:latin typeface="Calibri" pitchFamily="34" charset="0"/>
+                <a:ea typeface="Calibri" pitchFamily="34" charset="-122"/>
+                <a:cs typeface="Calibri" pitchFamily="34" charset="-120"/>
+              </a:rPr>
+              <a:t>Draft the </a:t>
+            </a:r>
+            <a:r>
+              <a:rPr lang="en-US" sz="1500" b="1" dirty="0">
+                <a:solidFill>
+                  <a:srgbClr val="222B36"/>
+                </a:solidFill>
+                <a:latin typeface="Calibri" pitchFamily="34" charset="0"/>
+                <a:ea typeface="Calibri" pitchFamily="34" charset="-122"/>
+                <a:cs typeface="Calibri" pitchFamily="34" charset="-120"/>
+              </a:rPr>
+              <a:t>first sentence of your Conclusion</a:t>
+            </a:r>
+            <a:r>
+              <a:rPr lang="en-US" sz="1500" dirty="0">
+                <a:solidFill>
+                  <a:srgbClr val="222B36"/>
+                </a:solidFill>
+                <a:latin typeface="Calibri" pitchFamily="34" charset="0"/>
+                <a:ea typeface="Calibri" pitchFamily="34" charset="-122"/>
+                <a:cs typeface="Calibri" pitchFamily="34" charset="-120"/>
+              </a:rPr>
+              <a:t>: it must answer your question.</a:t>
+            </a:r>
+            <a:endParaRPr lang="en-US" sz="1500" dirty="0"/>
+          </a:p>
+        </p:txBody>
+      </p:sp>
+      <p:sp>
+        <p:nvSpPr>
+          <p:cNvPr id="17" name="num_163"/>
+          <p:cNvSpPr/>
+          <p:nvPr/>
+        </p:nvSpPr>
+        <p:spPr>
+          <a:xfrm>
+            <a:off x="594360" y="4379976"/>
+            <a:ext cx="365760" cy="365760"/>
+          </a:xfrm>
+          <a:prstGeom prst="ellipse">
+            <a:avLst/>
+          </a:prstGeom>
+          <a:solidFill>
+            <a:srgbClr val="D98E1F"/>
+          </a:solidFill>
+          <a:ln w="12700">
+            <a:solidFill>
+              <a:srgbClr val="D98E1F"/>
+            </a:solidFill>
+            <a:prstDash val="solid"/>
+          </a:ln>
+        </p:spPr>
+      </p:sp>
+      <p:sp>
+        <p:nvSpPr>
+          <p:cNvPr id="18" name="text_164"/>
+          <p:cNvSpPr txBox="1"/>
+          <p:nvPr/>
+        </p:nvSpPr>
+        <p:spPr>
+          <a:xfrm>
+            <a:off x="594360" y="4379976"/>
+            <a:ext cx="365760" cy="365760"/>
+          </a:xfrm>
+          <a:prstGeom prst="rect">
+            <a:avLst/>
+          </a:prstGeom>
+          <a:noFill/>
+          <a:ln/>
+        </p:spPr>
+        <p:txBody>
+          <a:bodyPr wrap="square" lIns="0" tIns="0" rIns="0" bIns="0" rtlCol="0" anchor="ctr"/>
+          <a:lstStyle/>
+          <a:p>
+            <a:pPr algn="ctr" indent="0" marL="0">
+              <a:lnSpc>
+                <a:spcPct val="100000"/>
+              </a:lnSpc>
+              <a:buNone/>
+            </a:pPr>
+            <a:r>
+              <a:rPr lang="en-US" sz="1200" b="1" dirty="0">
+                <a:solidFill>
+                  <a:srgbClr val="FFFFFF"/>
+                </a:solidFill>
+                <a:latin typeface="Calibri" pitchFamily="34" charset="0"/>
+                <a:ea typeface="Calibri" pitchFamily="34" charset="-122"/>
+                <a:cs typeface="Calibri" pitchFamily="34" charset="-120"/>
+              </a:rPr>
+              <a:t>5</a:t>
+            </a:r>
+            <a:endParaRPr lang="en-US" sz="1200" dirty="0"/>
+          </a:p>
+        </p:txBody>
+      </p:sp>
+      <p:sp>
+        <p:nvSpPr>
+          <p:cNvPr id="19" name="text_165"/>
+          <p:cNvSpPr txBox="1"/>
+          <p:nvPr/>
+        </p:nvSpPr>
+        <p:spPr>
+          <a:xfrm>
+            <a:off x="1097280" y="4361688"/>
+            <a:ext cx="6126480" cy="658368"/>
+          </a:xfrm>
+          <a:prstGeom prst="rect">
+            <a:avLst/>
+          </a:prstGeom>
+          <a:noFill/>
+          <a:ln/>
+        </p:spPr>
+        <p:txBody>
+          <a:bodyPr wrap="square" lIns="635" tIns="635" rIns="635" bIns="635" rtlCol="0" anchor="t"/>
+          <a:lstStyle/>
+          <a:p>
+            <a:pPr algn="l" indent="0" marL="0">
+              <a:lnSpc>
+                <a:spcPct val="100000"/>
+              </a:lnSpc>
+              <a:buNone/>
+            </a:pPr>
+            <a:r>
+              <a:rPr lang="en-US" sz="1500" dirty="0">
+                <a:solidFill>
+                  <a:srgbClr val="222B36"/>
+                </a:solidFill>
+                <a:latin typeface="Calibri" pitchFamily="34" charset="0"/>
+                <a:ea typeface="Calibri" pitchFamily="34" charset="-122"/>
+                <a:cs typeface="Calibri" pitchFamily="34" charset="-120"/>
+              </a:rPr>
+              <a:t>With a partner, run the </a:t>
+            </a:r>
+            <a:r>
+              <a:rPr lang="en-US" sz="1500" b="1" dirty="0">
+                <a:solidFill>
+                  <a:srgbClr val="222B36"/>
+                </a:solidFill>
+                <a:latin typeface="Calibri" pitchFamily="34" charset="0"/>
+                <a:ea typeface="Calibri" pitchFamily="34" charset="-122"/>
+                <a:cs typeface="Calibri" pitchFamily="34" charset="-120"/>
+              </a:rPr>
+              <a:t>mirror test</a:t>
+            </a:r>
+            <a:r>
+              <a:rPr lang="en-US" sz="1500" dirty="0">
+                <a:solidFill>
+                  <a:srgbClr val="222B36"/>
+                </a:solidFill>
+                <a:latin typeface="Calibri" pitchFamily="34" charset="0"/>
+                <a:ea typeface="Calibri" pitchFamily="34" charset="-122"/>
+                <a:cs typeface="Calibri" pitchFamily="34" charset="-120"/>
+              </a:rPr>
+              <a:t> on your purpose statement and that sentence.</a:t>
+            </a:r>
+            <a:endParaRPr lang="en-US" sz="1500" dirty="0"/>
+          </a:p>
+        </p:txBody>
+      </p:sp>
+      <p:sp>
+        <p:nvSpPr>
+          <p:cNvPr id="20" name="card_166"/>
+          <p:cNvSpPr/>
+          <p:nvPr/>
+        </p:nvSpPr>
+        <p:spPr>
+          <a:xfrm>
+            <a:off x="7680960" y="1417320"/>
+            <a:ext cx="3959352" cy="2331720"/>
+          </a:xfrm>
+          <a:prstGeom prst="roundRect">
+            <a:avLst>
+              <a:gd name="adj" fmla="val 3137"/>
+            </a:avLst>
+          </a:prstGeom>
+          <a:solidFill>
+            <a:srgbClr val="1B2A41"/>
+          </a:solidFill>
+          <a:ln w="9525">
+            <a:solidFill>
+              <a:srgbClr val="1B2A41"/>
+            </a:solidFill>
+            <a:prstDash val="solid"/>
+          </a:ln>
+        </p:spPr>
+      </p:sp>
+      <p:sp>
+        <p:nvSpPr>
+          <p:cNvPr id="21" name="tag_167"/>
+          <p:cNvSpPr/>
+          <p:nvPr/>
+        </p:nvSpPr>
+        <p:spPr>
+          <a:xfrm>
+            <a:off x="7845552" y="1545336"/>
+            <a:ext cx="1234440" cy="256032"/>
+          </a:xfrm>
+          <a:prstGeom prst="roundRect">
+            <a:avLst>
+              <a:gd name="adj" fmla="val 21429"/>
+            </a:avLst>
+          </a:prstGeom>
+          <a:solidFill>
+            <a:srgbClr val="D98E1F"/>
+          </a:solidFill>
+          <a:ln w="12700">
+            <a:solidFill>
+              <a:srgbClr val="D98E1F"/>
+            </a:solidFill>
+            <a:prstDash val="solid"/>
+          </a:ln>
+        </p:spPr>
+      </p:sp>
+      <p:sp>
+        <p:nvSpPr>
+          <p:cNvPr id="22" name="text_168"/>
+          <p:cNvSpPr txBox="1"/>
+          <p:nvPr/>
+        </p:nvSpPr>
+        <p:spPr>
+          <a:xfrm>
+            <a:off x="7845552" y="1545336"/>
+            <a:ext cx="1234440" cy="256032"/>
+          </a:xfrm>
+          <a:prstGeom prst="rect">
+            <a:avLst/>
+          </a:prstGeom>
+          <a:noFill/>
+          <a:ln/>
+        </p:spPr>
+        <p:txBody>
+          <a:bodyPr wrap="square" lIns="0" tIns="0" rIns="0" bIns="0" rtlCol="0" anchor="ctr"/>
+          <a:lstStyle/>
+          <a:p>
+            <a:pPr algn="ctr" indent="0" marL="0">
+              <a:lnSpc>
+                <a:spcPct val="100000"/>
+              </a:lnSpc>
+              <a:buNone/>
+            </a:pPr>
+            <a:r>
+              <a:rPr lang="en-US" sz="1050" b="1" dirty="0">
+                <a:solidFill>
+                  <a:srgbClr val="FFFFFF"/>
+                </a:solidFill>
+                <a:latin typeface="Calibri" pitchFamily="34" charset="0"/>
+                <a:ea typeface="Calibri" pitchFamily="34" charset="-122"/>
+                <a:cs typeface="Calibri" pitchFamily="34" charset="-120"/>
+              </a:rPr>
+              <a:t>YOU LEAVE WITH</a:t>
+            </a:r>
+            <a:endParaRPr lang="en-US" sz="1050" dirty="0"/>
+          </a:p>
+        </p:txBody>
+      </p:sp>
+      <p:sp>
+        <p:nvSpPr>
+          <p:cNvPr id="23" name="cardbody_169"/>
+          <p:cNvSpPr txBox="1"/>
+          <p:nvPr/>
+        </p:nvSpPr>
+        <p:spPr>
+          <a:xfrm>
+            <a:off x="7845552" y="1892808"/>
+            <a:ext cx="3630168" cy="1764792"/>
+          </a:xfrm>
+          <a:prstGeom prst="rect">
+            <a:avLst/>
+          </a:prstGeom>
+          <a:noFill/>
+          <a:ln/>
+        </p:spPr>
+        <p:txBody>
+          <a:bodyPr wrap="square" lIns="381" tIns="381" rIns="381" bIns="381" rtlCol="0" anchor="t"/>
+          <a:lstStyle/>
+          <a:p>
+            <a:pPr marL="342900" indent="-342900">
+              <a:spcAft>
+                <a:spcPts val="500"/>
+              </a:spcAft>
+              <a:buSzPct val="100000"/>
+              <a:buChar char="■"/>
+            </a:pPr>
+            <a:r>
+              <a:rPr lang="en-US" sz="1450" dirty="0">
+                <a:solidFill>
+                  <a:srgbClr val="FFFFFF"/>
+                </a:solidFill>
+                <a:latin typeface="Calibri" pitchFamily="34" charset="0"/>
+                <a:ea typeface="Calibri" pitchFamily="34" charset="-122"/>
+                <a:cs typeface="Calibri" pitchFamily="34" charset="-120"/>
+              </a:rPr>
+              <a:t>Discussion topic sentences + one strong limitation</a:t>
+            </a:r>
+            <a:endParaRPr lang="en-US" sz="1450" dirty="0"/>
+          </a:p>
+          <a:p>
+            <a:pPr marL="342900" indent="-342900">
+              <a:spcAft>
+                <a:spcPts val="500"/>
+              </a:spcAft>
+              <a:buSzPct val="100000"/>
+              <a:buChar char="■"/>
+            </a:pPr>
+            <a:r>
+              <a:rPr lang="en-US" sz="1450" dirty="0">
+                <a:solidFill>
+                  <a:srgbClr val="FFFFFF"/>
+                </a:solidFill>
+                <a:latin typeface="Calibri" pitchFamily="34" charset="0"/>
+                <a:ea typeface="Calibri" pitchFamily="34" charset="-122"/>
+                <a:cs typeface="Calibri" pitchFamily="34" charset="-120"/>
+              </a:rPr>
+              <a:t>Conclusion sentence 1, mirror-tested</a:t>
+            </a:r>
+            <a:endParaRPr lang="en-US" sz="1450" dirty="0"/>
+          </a:p>
+          <a:p>
+            <a:pPr marL="342900" indent="-342900">
+              <a:spcAft>
+                <a:spcPts val="500"/>
+              </a:spcAft>
+              <a:buSzPct val="100000"/>
+              <a:buChar char="■"/>
+            </a:pPr>
+            <a:r>
+              <a:rPr lang="en-US" sz="1450" dirty="0">
+                <a:solidFill>
+                  <a:srgbClr val="FFFFFF"/>
+                </a:solidFill>
+                <a:latin typeface="Calibri" pitchFamily="34" charset="0"/>
+                <a:ea typeface="Calibri" pitchFamily="34" charset="-122"/>
+                <a:cs typeface="Calibri" pitchFamily="34" charset="-120"/>
+              </a:rPr>
+              <a:t>Everything you need to finish the draft by next week</a:t>
+            </a:r>
+            <a:endParaRPr lang="en-US" sz="1450" dirty="0"/>
+          </a:p>
+        </p:txBody>
+      </p:sp>
+      <p:sp>
+        <p:nvSpPr>
+          <p:cNvPr id="24" name="card_170"/>
+          <p:cNvSpPr/>
+          <p:nvPr/>
+        </p:nvSpPr>
+        <p:spPr>
+          <a:xfrm>
+            <a:off x="7680960" y="3931920"/>
+            <a:ext cx="3959352" cy="2377440"/>
+          </a:xfrm>
+          <a:prstGeom prst="roundRect">
+            <a:avLst>
+              <a:gd name="adj" fmla="val 3077"/>
+            </a:avLst>
+          </a:prstGeom>
+          <a:solidFill>
+            <a:srgbClr val="DCE7F2"/>
+          </a:solidFill>
+          <a:ln w="9525">
+            <a:solidFill>
+              <a:srgbClr val="DCE7F2"/>
+            </a:solidFill>
+            <a:prstDash val="solid"/>
+          </a:ln>
+        </p:spPr>
+      </p:sp>
+      <p:sp>
+        <p:nvSpPr>
+          <p:cNvPr id="25" name="tag_171"/>
+          <p:cNvSpPr/>
+          <p:nvPr/>
+        </p:nvSpPr>
+        <p:spPr>
+          <a:xfrm>
+            <a:off x="7845552" y="4059936"/>
+            <a:ext cx="923544" cy="256032"/>
+          </a:xfrm>
+          <a:prstGeom prst="roundRect">
+            <a:avLst>
+              <a:gd name="adj" fmla="val 21429"/>
+            </a:avLst>
+          </a:prstGeom>
+          <a:solidFill>
+            <a:srgbClr val="2E4A6B"/>
+          </a:solidFill>
+          <a:ln w="12700">
+            <a:solidFill>
+              <a:srgbClr val="2E4A6B"/>
+            </a:solidFill>
+            <a:prstDash val="solid"/>
+          </a:ln>
+        </p:spPr>
+      </p:sp>
+      <p:sp>
+        <p:nvSpPr>
+          <p:cNvPr id="26" name="text_172"/>
+          <p:cNvSpPr txBox="1"/>
+          <p:nvPr/>
+        </p:nvSpPr>
+        <p:spPr>
+          <a:xfrm>
+            <a:off x="7845552" y="4059936"/>
+            <a:ext cx="923544" cy="256032"/>
+          </a:xfrm>
+          <a:prstGeom prst="rect">
+            <a:avLst/>
+          </a:prstGeom>
+          <a:noFill/>
+          <a:ln/>
+        </p:spPr>
+        <p:txBody>
+          <a:bodyPr wrap="square" lIns="0" tIns="0" rIns="0" bIns="0" rtlCol="0" anchor="ctr"/>
+          <a:lstStyle/>
+          <a:p>
+            <a:pPr algn="ctr" indent="0" marL="0">
+              <a:lnSpc>
+                <a:spcPct val="100000"/>
+              </a:lnSpc>
+              <a:buNone/>
+            </a:pPr>
+            <a:r>
+              <a:rPr lang="en-US" sz="1050" b="1" dirty="0">
+                <a:solidFill>
+                  <a:srgbClr val="FFFFFF"/>
+                </a:solidFill>
+                <a:latin typeface="Calibri" pitchFamily="34" charset="0"/>
+                <a:ea typeface="Calibri" pitchFamily="34" charset="-122"/>
+                <a:cs typeface="Calibri" pitchFamily="34" charset="-120"/>
+              </a:rPr>
+              <a:t>PAIR CHECK</a:t>
+            </a:r>
+            <a:endParaRPr lang="en-US" sz="1050" dirty="0"/>
+          </a:p>
+        </p:txBody>
+      </p:sp>
+      <p:sp>
+        <p:nvSpPr>
+          <p:cNvPr id="27" name="cardbody_173"/>
+          <p:cNvSpPr txBox="1"/>
+          <p:nvPr/>
+        </p:nvSpPr>
+        <p:spPr>
+          <a:xfrm>
+            <a:off x="7845552" y="4407408"/>
+            <a:ext cx="3630168" cy="1810512"/>
+          </a:xfrm>
+          <a:prstGeom prst="rect">
+            <a:avLst/>
+          </a:prstGeom>
+          <a:noFill/>
+          <a:ln/>
+        </p:spPr>
+        <p:txBody>
+          <a:bodyPr wrap="square" lIns="381" tIns="381" rIns="381" bIns="381" rtlCol="0" anchor="t"/>
+          <a:lstStyle/>
+          <a:p>
+            <a:pPr marL="342900" indent="-342900">
+              <a:spcAft>
+                <a:spcPts val="500"/>
+              </a:spcAft>
+              <a:buSzPct val="100000"/>
+              <a:buChar char="■"/>
+            </a:pPr>
+            <a:r>
+              <a:rPr lang="en-US" sz="1400" dirty="0">
+                <a:solidFill>
+                  <a:srgbClr val="222B36"/>
+                </a:solidFill>
+                <a:latin typeface="Calibri" pitchFamily="34" charset="0"/>
+                <a:ea typeface="Calibri" pitchFamily="34" charset="-122"/>
+                <a:cs typeface="Calibri" pitchFamily="34" charset="-120"/>
+              </a:rPr>
+              <a:t>Is the EXPLAIN paragraph a </a:t>
+            </a:r>
+            <a:r>
+              <a:rPr lang="en-US" sz="1400" b="1" dirty="0">
+                <a:solidFill>
+                  <a:srgbClr val="222B36"/>
+                </a:solidFill>
+                <a:latin typeface="Calibri" pitchFamily="34" charset="0"/>
+                <a:ea typeface="Calibri" pitchFamily="34" charset="-122"/>
+                <a:cs typeface="Calibri" pitchFamily="34" charset="-120"/>
+              </a:rPr>
+              <a:t>mechanism</a:t>
+            </a:r>
+            <a:r>
+              <a:rPr lang="en-US" sz="1400" dirty="0">
+                <a:solidFill>
+                  <a:srgbClr val="222B36"/>
+                </a:solidFill>
+                <a:latin typeface="Calibri" pitchFamily="34" charset="0"/>
+                <a:ea typeface="Calibri" pitchFamily="34" charset="-122"/>
+                <a:cs typeface="Calibri" pitchFamily="34" charset="-120"/>
+              </a:rPr>
+              <a:t>, or just ‘ENSO affects…’?</a:t>
+            </a:r>
+            <a:endParaRPr lang="en-US" sz="1400" dirty="0"/>
+          </a:p>
+          <a:p>
+            <a:pPr marL="342900" indent="-342900">
+              <a:spcAft>
+                <a:spcPts val="500"/>
+              </a:spcAft>
+              <a:buSzPct val="100000"/>
+              <a:buChar char="■"/>
+            </a:pPr>
+            <a:r>
+              <a:rPr lang="en-US" sz="1400" dirty="0">
+                <a:solidFill>
+                  <a:srgbClr val="222B36"/>
+                </a:solidFill>
+                <a:latin typeface="Calibri" pitchFamily="34" charset="0"/>
+                <a:ea typeface="Calibri" pitchFamily="34" charset="-122"/>
+                <a:cs typeface="Calibri" pitchFamily="34" charset="-120"/>
+              </a:rPr>
+              <a:t>Is the limitation tied to its </a:t>
+            </a:r>
+            <a:r>
+              <a:rPr lang="en-US" sz="1400" b="1" dirty="0">
+                <a:solidFill>
+                  <a:srgbClr val="222B36"/>
+                </a:solidFill>
+                <a:latin typeface="Calibri" pitchFamily="34" charset="0"/>
+                <a:ea typeface="Calibri" pitchFamily="34" charset="-122"/>
+                <a:cs typeface="Calibri" pitchFamily="34" charset="-120"/>
+              </a:rPr>
+              <a:t>effect on the answer</a:t>
+            </a:r>
+            <a:r>
+              <a:rPr lang="en-US" sz="1400" dirty="0">
+                <a:solidFill>
+                  <a:srgbClr val="222B36"/>
+                </a:solidFill>
+                <a:latin typeface="Calibri" pitchFamily="34" charset="0"/>
+                <a:ea typeface="Calibri" pitchFamily="34" charset="-122"/>
+                <a:cs typeface="Calibri" pitchFamily="34" charset="-120"/>
+              </a:rPr>
+              <a:t>?</a:t>
+            </a:r>
+            <a:endParaRPr lang="en-US" sz="1400" dirty="0"/>
+          </a:p>
+          <a:p>
+            <a:pPr marL="342900" indent="-342900">
+              <a:spcAft>
+                <a:spcPts val="500"/>
+              </a:spcAft>
+              <a:buSzPct val="100000"/>
+              <a:buChar char="■"/>
+            </a:pPr>
+            <a:r>
+              <a:rPr lang="en-US" sz="1400" dirty="0">
+                <a:solidFill>
+                  <a:srgbClr val="222B36"/>
+                </a:solidFill>
+                <a:latin typeface="Calibri" pitchFamily="34" charset="0"/>
+                <a:ea typeface="Calibri" pitchFamily="34" charset="-122"/>
+                <a:cs typeface="Calibri" pitchFamily="34" charset="-120"/>
+              </a:rPr>
+              <a:t>Mirror test: same question, same tags?</a:t>
+            </a:r>
+            <a:endParaRPr lang="en-US" sz="1400" dirty="0"/>
+          </a:p>
+        </p:txBody>
+      </p:sp>
+      <p:sp>
+        <p:nvSpPr>
+          <p:cNvPr id="25" name="Slide Number Placeholder 0"/>
+          <p:cNvSpPr>
+            <a:spLocks noGrp="1"/>
+          </p:cNvSpPr>
+          <p:nvPr>
+            <p:ph type="sldNum" sz="quarter" idx="4294967295"/>
+          </p:nvPr>
+        </p:nvSpPr>
+        <p:spPr>
+          <a:xfrm>
+            <a:off x="11274552" y="6473952"/>
+            <a:ext cx="548640" cy="228600"/>
+          </a:xfrm>
+          <a:prstGeom prst="rect">
+            <a:avLst/>
+          </a:prstGeom>
+          <a:extLst>
+            <a:ext uri="{C572A759-6A51-4108-AA02-DFA0A04FC94B}">
+              <ma14:wrappingTextBoxFlag xmlns:ma14="http://schemas.microsoft.com/office/mac/drawingml/2011/main" val="0"/>
+            </a:ext>
+          </a:extLst>
+        </p:spPr>
+        <p:txBody>
+          <a:bodyPr/>
+          <a:lstStyle>
+            <a:lvl1pPr>
+              <a:defRPr sz="900">
+                <a:solidFill>
+                  <a:srgbClr val="8A93A0"/>
+                </a:solidFill>
+                <a:latin typeface="Calibri"/>
+                <a:ea typeface="Calibri"/>
+                <a:cs typeface="Calibri"/>
+              </a:defRPr>
+            </a:lvl1pPr>
+          </a:lstStyle>
+          <a:p>
+            <a:pPr algn="r"/>
+            <a:fld id="{F7021451-1387-4CA6-816F-3879F97B5CBC}" type="slidenum">
+              <a:rPr b="0" lang="en-US"/>
+              <a:t>11</a:t>
+            </a:fld>
+            <a:endParaRPr lang="en-US"/>
+          </a:p>
+        </p:txBody>
+      </p:sp>
+    </p:spTree>
+  </p:cSld>
+  <p:clrMapOvr>
+    <a:masterClrMapping/>
+  </p:clrMapOvr>
+</p:sld>
+</file>
+
+<file path=ppt/slides/slide12.xml><?xml version="1.0" encoding="utf-8"?>
+<p:sld xmlns:a="http://schemas.openxmlformats.org/drawingml/2006/main" xmlns:r="http://schemas.openxmlformats.org/officeDocument/2006/relationships" xmlns:p="http://schemas.openxmlformats.org/presentationml/2006/main">
+  <p:cSld name="Slide 12">
+    <p:spTree>
+      <p:nvGrpSpPr>
+        <p:cNvPr id="1" name=""/>
+        <p:cNvGrpSpPr/>
+        <p:nvPr/>
+      </p:nvGrpSpPr>
+      <p:grpSpPr>
+        <a:xfrm>
+          <a:off x="0" y="0"/>
+          <a:ext cx="0" cy="0"/>
+          <a:chOff x="0" y="0"/>
+          <a:chExt cx="0" cy="0"/>
+        </a:xfrm>
+      </p:grpSpPr>
+      <p:sp>
+        <p:nvSpPr>
+          <p:cNvPr id="2" name="text_174"/>
+          <p:cNvSpPr txBox="1"/>
+          <p:nvPr/>
+        </p:nvSpPr>
+        <p:spPr>
+          <a:xfrm>
+            <a:off x="548640" y="365760"/>
+            <a:ext cx="11064240" cy="640080"/>
+          </a:xfrm>
+          <a:prstGeom prst="rect">
+            <a:avLst/>
+          </a:prstGeom>
+          <a:noFill/>
+          <a:ln/>
+        </p:spPr>
+        <p:txBody>
+          <a:bodyPr wrap="square" lIns="635" tIns="635" rIns="635" bIns="635" rtlCol="0" anchor="b"/>
+          <a:lstStyle/>
+          <a:p>
+            <a:pPr algn="l" indent="0" marL="0">
+              <a:lnSpc>
+                <a:spcPct val="100000"/>
+              </a:lnSpc>
+              <a:buNone/>
+            </a:pPr>
+            <a:r>
+              <a:rPr lang="en-US" sz="2800" b="1" dirty="0">
+                <a:solidFill>
+                  <a:srgbClr val="1B2A41"/>
+                </a:solidFill>
+                <a:latin typeface="Georgia" pitchFamily="34" charset="0"/>
+                <a:ea typeface="Georgia" pitchFamily="34" charset="-122"/>
+                <a:cs typeface="Georgia" pitchFamily="34" charset="-120"/>
+              </a:rPr>
+              <a:t>Before Tutorial 8  ·  Thu 3 Dec</a:t>
+            </a:r>
+            <a:endParaRPr lang="en-US" sz="2800" dirty="0"/>
+          </a:p>
+        </p:txBody>
+      </p:sp>
+      <p:sp>
+        <p:nvSpPr>
+          <p:cNvPr id="3" name="text_175"/>
+          <p:cNvSpPr txBox="1"/>
+          <p:nvPr/>
+        </p:nvSpPr>
+        <p:spPr>
+          <a:xfrm>
+            <a:off x="548640" y="1188720"/>
+            <a:ext cx="11064240" cy="411480"/>
+          </a:xfrm>
+          <a:prstGeom prst="rect">
+            <a:avLst/>
+          </a:prstGeom>
+          <a:noFill/>
+          <a:ln/>
+        </p:spPr>
+        <p:txBody>
+          <a:bodyPr wrap="square" lIns="635" tIns="635" rIns="635" bIns="635" rtlCol="0" anchor="t"/>
+          <a:lstStyle/>
+          <a:p>
+            <a:pPr algn="l" indent="0" marL="0">
+              <a:lnSpc>
+                <a:spcPct val="100000"/>
+              </a:lnSpc>
+              <a:buNone/>
+            </a:pPr>
+            <a:r>
               <a:rPr lang="en-US" sz="1500" i="1" dirty="0">
                 <a:solidFill>
                   <a:srgbClr val="5B6573"/>
@@ -3941,7 +4759,7 @@
       </p:sp>
       <p:sp>
         <p:nvSpPr>
-          <p:cNvPr id="4" name="card_163"/>
+          <p:cNvPr id="4" name="card_176"/>
           <p:cNvSpPr/>
           <p:nvPr/>
         </p:nvSpPr>
@@ -3968,7 +4786,7 @@
       </p:sp>
       <p:sp>
         <p:nvSpPr>
-          <p:cNvPr id="5" name="tag_164"/>
+          <p:cNvPr id="5" name="tag_177"/>
           <p:cNvSpPr/>
           <p:nvPr/>
         </p:nvSpPr>
@@ -3995,7 +4813,7 @@
       </p:sp>
       <p:sp>
         <p:nvSpPr>
-          <p:cNvPr id="6" name="text_165"/>
+          <p:cNvPr id="6" name="text_178"/>
           <p:cNvSpPr txBox="1"/>
           <p:nvPr/>
         </p:nvSpPr>
@@ -4037,7 +4855,7 @@
       </p:sp>
       <p:sp>
         <p:nvSpPr>
-          <p:cNvPr id="7" name="text_166"/>
+          <p:cNvPr id="7" name="text_179"/>
           <p:cNvSpPr txBox="1"/>
           <p:nvPr/>
         </p:nvSpPr>
@@ -4079,7 +4897,7 @@
       </p:sp>
       <p:sp>
         <p:nvSpPr>
-          <p:cNvPr id="8" name="cardbody_167"/>
+          <p:cNvPr id="8" name="cardbody_180"/>
           <p:cNvSpPr txBox="1"/>
           <p:nvPr/>
         </p:nvSpPr>
@@ -4164,7 +4982,7 @@
       </p:sp>
       <p:sp>
         <p:nvSpPr>
-          <p:cNvPr id="9" name="card_168"/>
+          <p:cNvPr id="9" name="card_181"/>
           <p:cNvSpPr/>
           <p:nvPr/>
         </p:nvSpPr>
@@ -4191,7 +5009,7 @@
       </p:sp>
       <p:sp>
         <p:nvSpPr>
-          <p:cNvPr id="10" name="tag_169"/>
+          <p:cNvPr id="10" name="tag_182"/>
           <p:cNvSpPr/>
           <p:nvPr/>
         </p:nvSpPr>
@@ -4218,7 +5036,7 @@
       </p:sp>
       <p:sp>
         <p:nvSpPr>
-          <p:cNvPr id="11" name="text_170"/>
+          <p:cNvPr id="11" name="text_183"/>
           <p:cNvSpPr txBox="1"/>
           <p:nvPr/>
         </p:nvSpPr>
@@ -4260,7 +5078,7 @@
       </p:sp>
       <p:sp>
         <p:nvSpPr>
-          <p:cNvPr id="12" name="text_171"/>
+          <p:cNvPr id="12" name="text_184"/>
           <p:cNvSpPr txBox="1"/>
           <p:nvPr/>
         </p:nvSpPr>
@@ -4302,7 +5120,7 @@
       </p:sp>
       <p:sp>
         <p:nvSpPr>
-          <p:cNvPr id="13" name="cardbody_172"/>
+          <p:cNvPr id="13" name="cardbody_185"/>
           <p:cNvSpPr txBox="1"/>
           <p:nvPr/>
         </p:nvSpPr>
@@ -4387,7 +5205,7 @@
       </p:sp>
       <p:sp>
         <p:nvSpPr>
-          <p:cNvPr id="14" name="card_173"/>
+          <p:cNvPr id="14" name="card_186"/>
           <p:cNvSpPr/>
           <p:nvPr/>
         </p:nvSpPr>
@@ -4414,7 +5232,7 @@
       </p:sp>
       <p:sp>
         <p:nvSpPr>
-          <p:cNvPr id="15" name="tag_174"/>
+          <p:cNvPr id="15" name="tag_187"/>
           <p:cNvSpPr/>
           <p:nvPr/>
         </p:nvSpPr>
@@ -4441,7 +5259,7 @@
       </p:sp>
       <p:sp>
         <p:nvSpPr>
-          <p:cNvPr id="16" name="text_175"/>
+          <p:cNvPr id="16" name="text_188"/>
           <p:cNvSpPr txBox="1"/>
           <p:nvPr/>
         </p:nvSpPr>
@@ -4483,7 +5301,7 @@
       </p:sp>
       <p:sp>
         <p:nvSpPr>
-          <p:cNvPr id="17" name="text_176"/>
+          <p:cNvPr id="17" name="text_189"/>
           <p:cNvSpPr txBox="1"/>
           <p:nvPr/>
         </p:nvSpPr>
@@ -4525,7 +5343,7 @@
       </p:sp>
       <p:sp>
         <p:nvSpPr>
-          <p:cNvPr id="18" name="cardbody_177"/>
+          <p:cNvPr id="18" name="cardbody_190"/>
           <p:cNvSpPr txBox="1"/>
           <p:nvPr/>
         </p:nvSpPr>
@@ -4621,7 +5439,7 @@
       </p:sp>
       <p:sp>
         <p:nvSpPr>
-          <p:cNvPr id="19" name="card_178"/>
+          <p:cNvPr id="19" name="card_191"/>
           <p:cNvSpPr/>
           <p:nvPr/>
         </p:nvSpPr>
@@ -4648,7 +5466,7 @@
       </p:sp>
       <p:sp>
         <p:nvSpPr>
-          <p:cNvPr id="20" name="tag_179"/>
+          <p:cNvPr id="20" name="tag_192"/>
           <p:cNvSpPr/>
           <p:nvPr/>
         </p:nvSpPr>
@@ -4675,7 +5493,7 @@
       </p:sp>
       <p:sp>
         <p:nvSpPr>
-          <p:cNvPr id="21" name="text_180"/>
+          <p:cNvPr id="21" name="text_193"/>
           <p:cNvSpPr txBox="1"/>
           <p:nvPr/>
         </p:nvSpPr>
@@ -4717,7 +5535,7 @@
       </p:sp>
       <p:sp>
         <p:nvSpPr>
-          <p:cNvPr id="22" name="cardbody_181"/>
+          <p:cNvPr id="22" name="cardbody_194"/>
           <p:cNvSpPr txBox="1"/>
           <p:nvPr/>
         </p:nvSpPr>
@@ -4792,7 +5610,7 @@
       </p:sp>
       <p:sp>
         <p:nvSpPr>
-          <p:cNvPr id="23" name="card_182"/>
+          <p:cNvPr id="23" name="card_195"/>
           <p:cNvSpPr/>
           <p:nvPr/>
         </p:nvSpPr>
@@ -4819,7 +5637,7 @@
       </p:sp>
       <p:sp>
         <p:nvSpPr>
-          <p:cNvPr id="24" name="tag_183"/>
+          <p:cNvPr id="24" name="tag_196"/>
           <p:cNvSpPr/>
           <p:nvPr/>
         </p:nvSpPr>
@@ -4846,7 +5664,7 @@
       </p:sp>
       <p:sp>
         <p:nvSpPr>
-          <p:cNvPr id="25" name="text_184"/>
+          <p:cNvPr id="25" name="text_197"/>
           <p:cNvSpPr txBox="1"/>
           <p:nvPr/>
         </p:nvSpPr>
@@ -4888,7 +5706,7 @@
       </p:sp>
       <p:sp>
         <p:nvSpPr>
-          <p:cNvPr id="26" name="cardbody_185"/>
+          <p:cNvPr id="26" name="cardbody_198"/>
           <p:cNvSpPr txBox="1"/>
           <p:nvPr/>
         </p:nvSpPr>
@@ -5014,7 +5832,7 @@
             <a:pPr algn="r"/>
             <a:fld id="{F7021451-1387-4CA6-816F-3879F97B5CBC}" type="slidenum">
               <a:rPr b="0" lang="en-US"/>
-              <a:t>11</a:t>
+              <a:t>12</a:t>
             </a:fld>
             <a:endParaRPr lang="en-US"/>
           </a:p>
@@ -5352,7 +6170,7 @@
                 <a:ea typeface="Calibri" pitchFamily="34" charset="-122"/>
                 <a:cs typeface="Calibri" pitchFamily="34" charset="-120"/>
               </a:rPr>
-              <a:t>Results vs Discussion; a menu of Discussion moves</a:t>
+              <a:t>Results vs Discussion; a menu of Discussion moves; speculation vs evidence</a:t>
             </a:r>
             <a:endParaRPr lang="en-US" sz="1600" dirty="0"/>
           </a:p>
@@ -8896,7 +9714,7 @@
                 <a:ea typeface="Georgia" pitchFamily="34" charset="-122"/>
                 <a:cs typeface="Georgia" pitchFamily="34" charset="-120"/>
               </a:rPr>
-              <a:t>Limitations that build trust</a:t>
+              <a:t>Evidence or speculation? The 2022–23 low</a:t>
             </a:r>
             <a:endParaRPr lang="en-US" sz="2800" dirty="0"/>
           </a:p>
@@ -8938,7 +9756,7 @@
                 <a:ea typeface="Calibri" pitchFamily="34" charset="-122"/>
                 <a:cs typeface="Calibri" pitchFamily="34" charset="-120"/>
               </a:rPr>
-              <a:t>Schultz: being forthright about limitations ‘will enhance, not reduce, your credibility’. Astute readers will spot them anyway.</a:t>
+              <a:t>A real case from the notebook's year-to-year plot: global-mean cloud in ERA5 was at its lowest in 2022–23. A tempting explanation is COVID.</a:t>
             </a:r>
             <a:endParaRPr lang="en-US" sz="1500" dirty="0"/>
           </a:p>
@@ -8953,11 +9771,11 @@
         <p:spPr>
           <a:xfrm>
             <a:off x="548640" y="1691640"/>
-            <a:ext cx="5440680" cy="3017520"/>
+            <a:ext cx="5440680" cy="2743200"/>
           </a:xfrm>
           <a:prstGeom prst="roundRect">
             <a:avLst>
-              <a:gd name="adj" fmla="val 2424"/>
+              <a:gd name="adj" fmla="val 2667"/>
             </a:avLst>
           </a:prstGeom>
           <a:solidFill>
@@ -8980,7 +9798,7 @@
         <p:spPr>
           <a:xfrm>
             <a:off x="713232" y="1819656"/>
-            <a:ext cx="457200" cy="256032"/>
+            <a:ext cx="768096" cy="256032"/>
           </a:xfrm>
           <a:prstGeom prst="roundRect">
             <a:avLst>
@@ -9007,7 +9825,7 @@
         <p:spPr>
           <a:xfrm>
             <a:off x="713232" y="1819656"/>
-            <a:ext cx="457200" cy="256032"/>
+            <a:ext cx="768096" cy="256032"/>
           </a:xfrm>
           <a:prstGeom prst="rect">
             <a:avLst/>
@@ -9034,7 +9852,7 @@
                 <a:ea typeface="Calibri" pitchFamily="34" charset="-122"/>
                 <a:cs typeface="Calibri" pitchFamily="34" charset="-120"/>
               </a:rPr>
-              <a:t>WEAK</a:t>
+              <a:t>TEMPTING</a:t>
             </a:r>
             <a:endParaRPr lang="en-US" sz="1050" dirty="0"/>
           </a:p>
@@ -9049,7 +9867,7 @@
         <p:spPr>
           <a:xfrm>
             <a:off x="713232" y="2167128"/>
-            <a:ext cx="5111496" cy="2450592"/>
+            <a:ext cx="5111496" cy="2176272"/>
           </a:xfrm>
           <a:prstGeom prst="rect">
             <a:avLst/>
@@ -9076,7 +9894,7 @@
                 <a:ea typeface="Georgia" pitchFamily="34" charset="-122"/>
                 <a:cs typeface="Georgia" pitchFamily="34" charset="-120"/>
               </a:rPr>
-              <a:t>“There are some limitations to this study, such as the short dataset. More data would improve the results and further research is needed.”</a:t>
+              <a:t>“The low cloud cover in 2022–23 was caused by the drop in pollution during the COVID-19 lockdowns.”</a:t>
             </a:r>
             <a:endParaRPr lang="en-US" sz="1400" dirty="0"/>
           </a:p>
@@ -9091,11 +9909,11 @@
         <p:spPr>
           <a:xfrm>
             <a:off x="6199632" y="1691640"/>
-            <a:ext cx="5440680" cy="3017520"/>
+            <a:ext cx="5440680" cy="2743200"/>
           </a:xfrm>
           <a:prstGeom prst="roundRect">
             <a:avLst>
-              <a:gd name="adj" fmla="val 2424"/>
+              <a:gd name="adj" fmla="val 2667"/>
             </a:avLst>
           </a:prstGeom>
           <a:solidFill>
@@ -9118,7 +9936,7 @@
         <p:spPr>
           <a:xfrm>
             <a:off x="6364224" y="1819656"/>
-            <a:ext cx="612648" cy="256032"/>
+            <a:ext cx="923544" cy="256032"/>
           </a:xfrm>
           <a:prstGeom prst="roundRect">
             <a:avLst>
@@ -9145,7 +9963,7 @@
         <p:spPr>
           <a:xfrm>
             <a:off x="6364224" y="1819656"/>
-            <a:ext cx="612648" cy="256032"/>
+            <a:ext cx="923544" cy="256032"/>
           </a:xfrm>
           <a:prstGeom prst="rect">
             <a:avLst/>
@@ -9172,7 +9990,7 @@
                 <a:ea typeface="Calibri" pitchFamily="34" charset="-122"/>
                 <a:cs typeface="Calibri" pitchFamily="34" charset="-120"/>
               </a:rPr>
-              <a:t>STRONG</a:t>
+              <a:t>DEFENSIBLE</a:t>
             </a:r>
             <a:endParaRPr lang="en-US" sz="1050" dirty="0"/>
           </a:p>
@@ -9187,7 +10005,7 @@
         <p:spPr>
           <a:xfrm>
             <a:off x="6364224" y="2167128"/>
-            <a:ext cx="5111496" cy="2450592"/>
+            <a:ext cx="5111496" cy="2176272"/>
           </a:xfrm>
           <a:prstGeom prst="rect">
             <a:avLst/>
@@ -9214,7 +10032,7 @@
                 <a:ea typeface="Georgia" pitchFamily="34" charset="-122"/>
                 <a:cs typeface="Georgia" pitchFamily="34" charset="-120"/>
               </a:rPr>
-              <a:t>“The 54 El Niño months come from only about six events, and 14 of them belong to the exceptionally strong 2015–16 event. Recomputing the composite without 2015–16 would show whether the CP signal is a property of El Niño in general or of one extreme event. In addition, ERA5 cloud cover comes from the model's cloud scheme rather than direct observation, so the magnitude (though probably not the sign) of the response should be treated with caution.”</a:t>
+              <a:t>“Global-mean cloud cover was lowest in 2022–23, 0.8–1.0 pp below the 2010–2019 mean, consistent with the record-low planetary albedo reported for 2023 (Goessling et al., 2024). The cause is debated: natural variability, cleaner air (e.g. the 2020 shipping fuel rules) and a warming feedback have all been proposed. Lockdown emission cuts are unlikely, as their effect peaked in 2020 (Gettelman et al., 2021), and ERA5 does not track year-to-year aerosol changes, so these data cannot test an aerosol cause.”</a:t>
             </a:r>
             <a:endParaRPr lang="en-US" sz="1400" dirty="0"/>
           </a:p>
@@ -9228,7 +10046,7 @@
         </p:nvSpPr>
         <p:spPr>
           <a:xfrm>
-            <a:off x="548640" y="4892040"/>
+            <a:off x="548640" y="4617720"/>
             <a:ext cx="2743200" cy="274320"/>
           </a:xfrm>
           <a:prstGeom prst="rect">
@@ -9270,8 +10088,8 @@
         </p:nvSpPr>
         <p:spPr>
           <a:xfrm>
-            <a:off x="548640" y="5166360"/>
-            <a:ext cx="11064240" cy="1188720"/>
+            <a:off x="548640" y="4892040"/>
+            <a:ext cx="11064240" cy="1463040"/>
           </a:xfrm>
           <a:prstGeom prst="rect">
             <a:avLst/>
@@ -9299,7 +10117,7 @@
                 <a:ea typeface="Calibri" pitchFamily="34" charset="-122"/>
                 <a:cs typeface="Calibri" pitchFamily="34" charset="-120"/>
               </a:rPr>
-              <a:t>Specific:</a:t>
+              <a:t>Timing check:</a:t>
             </a:r>
             <a:r>
               <a:rPr lang="en-US" sz="1450" dirty="0">
@@ -9310,7 +10128,7 @@
                 <a:ea typeface="Calibri" pitchFamily="34" charset="-122"/>
                 <a:cs typeface="Calibri" pitchFamily="34" charset="-120"/>
               </a:rPr>
-              <a:t> says exactly what is limited, how much, and its likely </a:t>
+              <a:t> does the proposed cause come </a:t>
             </a:r>
             <a:r>
               <a:rPr lang="en-US" sz="1450" b="1" dirty="0">
@@ -9321,7 +10139,7 @@
                 <a:ea typeface="Calibri" pitchFamily="34" charset="-122"/>
                 <a:cs typeface="Calibri" pitchFamily="34" charset="-120"/>
               </a:rPr>
-              <a:t>effect on the answer</a:t>
+              <a:t>before</a:t>
             </a:r>
             <a:r>
               <a:rPr lang="en-US" sz="1450" dirty="0">
@@ -9332,7 +10150,7 @@
                 <a:ea typeface="Calibri" pitchFamily="34" charset="-122"/>
                 <a:cs typeface="Calibri" pitchFamily="34" charset="-120"/>
               </a:rPr>
-              <a:t>.</a:t>
+              <a:t> the effect, and last as long? (Lockdowns: mainly 2020.)</a:t>
             </a:r>
             <a:endParaRPr lang="en-US" sz="1450" dirty="0"/>
           </a:p>
@@ -9345,6 +10163,17 @@
               <a:buChar char="■"/>
             </a:pPr>
             <a:r>
+              <a:rPr lang="en-US" sz="1450" b="1" dirty="0">
+                <a:solidFill>
+                  <a:srgbClr val="222B36"/>
+                </a:solidFill>
+                <a:latin typeface="Calibri" pitchFamily="34" charset="0"/>
+                <a:ea typeface="Calibri" pitchFamily="34" charset="-122"/>
+                <a:cs typeface="Calibri" pitchFamily="34" charset="-120"/>
+              </a:rPr>
+              <a:t>Data check:</a:t>
+            </a:r>
+            <a:r>
               <a:rPr lang="en-US" sz="1450" dirty="0">
                 <a:solidFill>
                   <a:srgbClr val="222B36"/>
@@ -9353,29 +10182,7 @@
                 <a:ea typeface="Calibri" pitchFamily="34" charset="-122"/>
                 <a:cs typeface="Calibri" pitchFamily="34" charset="-120"/>
               </a:rPr>
-              <a:t>Suggests a </a:t>
-            </a:r>
-            <a:r>
-              <a:rPr lang="en-US" sz="1450" b="1" dirty="0">
-                <a:solidFill>
-                  <a:srgbClr val="222B36"/>
-                </a:solidFill>
-                <a:latin typeface="Calibri" pitchFamily="34" charset="0"/>
-                <a:ea typeface="Calibri" pitchFamily="34" charset="-122"/>
-                <a:cs typeface="Calibri" pitchFamily="34" charset="-120"/>
-              </a:rPr>
-              <a:t>concrete check</a:t>
-            </a:r>
-            <a:r>
-              <a:rPr lang="en-US" sz="1450" dirty="0">
-                <a:solidFill>
-                  <a:srgbClr val="222B36"/>
-                </a:solidFill>
-                <a:latin typeface="Calibri" pitchFamily="34" charset="0"/>
-                <a:ea typeface="Calibri" pitchFamily="34" charset="-122"/>
-                <a:cs typeface="Calibri" pitchFamily="34" charset="-120"/>
-              </a:rPr>
-              <a:t> instead of ‘more research is needed’.</a:t>
+              <a:t> can your dataset even ‘see’ the cause? ERA5 can't test an aerosol explanation.</a:t>
             </a:r>
             <a:endParaRPr lang="en-US" sz="1450" dirty="0"/>
           </a:p>
@@ -9396,7 +10203,7 @@
                 <a:ea typeface="Calibri" pitchFamily="34" charset="-122"/>
                 <a:cs typeface="Calibri" pitchFamily="34" charset="-120"/>
               </a:rPr>
-              <a:t>Picks limitations that </a:t>
+              <a:t>Names </a:t>
             </a:r>
             <a:r>
               <a:rPr lang="en-US" sz="1450" b="1" dirty="0">
@@ -9407,7 +10214,7 @@
                 <a:ea typeface="Calibri" pitchFamily="34" charset="-122"/>
                 <a:cs typeface="Calibri" pitchFamily="34" charset="-120"/>
               </a:rPr>
-              <a:t>matter</a:t>
+              <a:t>alternatives</a:t>
             </a:r>
             <a:r>
               <a:rPr lang="en-US" sz="1450" dirty="0">
@@ -9418,7 +10225,29 @@
                 <a:ea typeface="Calibri" pitchFamily="34" charset="-122"/>
                 <a:cs typeface="Calibri" pitchFamily="34" charset="-120"/>
               </a:rPr>
-              <a:t> for this question, not a generic list.</a:t>
+              <a:t> and </a:t>
+            </a:r>
+            <a:r>
+              <a:rPr lang="en-US" sz="1450" b="1" dirty="0">
+                <a:solidFill>
+                  <a:srgbClr val="222B36"/>
+                </a:solidFill>
+                <a:latin typeface="Calibri" pitchFamily="34" charset="0"/>
+                <a:ea typeface="Calibri" pitchFamily="34" charset="-122"/>
+                <a:cs typeface="Calibri" pitchFamily="34" charset="-120"/>
+              </a:rPr>
+              <a:t>cites</a:t>
+            </a:r>
+            <a:r>
+              <a:rPr lang="en-US" sz="1450" dirty="0">
+                <a:solidFill>
+                  <a:srgbClr val="222B36"/>
+                </a:solidFill>
+                <a:latin typeface="Calibri" pitchFamily="34" charset="0"/>
+                <a:ea typeface="Calibri" pitchFamily="34" charset="-122"/>
+                <a:cs typeface="Calibri" pitchFamily="34" charset="-120"/>
+              </a:rPr>
+              <a:t> who proposed them, rather than picking one.</a:t>
             </a:r>
             <a:endParaRPr lang="en-US" sz="1450" dirty="0"/>
           </a:p>
@@ -9460,7 +10289,7 @@
                 <a:ea typeface="Calibri" pitchFamily="34" charset="-122"/>
                 <a:cs typeface="Calibri" pitchFamily="34" charset="-120"/>
               </a:rPr>
-              <a:t>Source: Schultz, D. M. (2009) Eloquent Science, American Meteorological Society, §7.2 ‘Making writing more accessible’ (justify assumptions; explain limitations).</a:t>
+              <a:t>Gettelman et al. (2021) GRL 48, e2020GL091805; Goessling, Rackow &amp; Jung (2024) Science; Zhang et al. (2025) Commun. Earth Environ.</a:t>
             </a:r>
             <a:endParaRPr lang="en-US" sz="900" dirty="0"/>
           </a:p>
@@ -9575,7 +10404,7 @@
                 <a:ea typeface="Georgia" pitchFamily="34" charset="-122"/>
                 <a:cs typeface="Georgia" pitchFamily="34" charset="-120"/>
               </a:rPr>
-              <a:t>Conclusions that land</a:t>
+              <a:t>Limitations that build trust</a:t>
             </a:r>
             <a:endParaRPr lang="en-US" sz="2800" dirty="0"/>
           </a:p>
@@ -9617,7 +10446,7 @@
                 <a:ea typeface="Calibri" pitchFamily="34" charset="-122"/>
                 <a:cs typeface="Calibri" pitchFamily="34" charset="-120"/>
               </a:rPr>
-              <a:t>Schultz: answer the question; two or three take-home findings; nothing new; end ‘forcefully, not on a whimper’.</a:t>
+              <a:t>Schultz: being forthright about limitations ‘will enhance, not reduce, your credibility’. Astute readers will spot them anyway.</a:t>
             </a:r>
             <a:endParaRPr lang="en-US" sz="1500" dirty="0"/>
           </a:p>
@@ -9632,11 +10461,11 @@
         <p:spPr>
           <a:xfrm>
             <a:off x="548640" y="1691640"/>
-            <a:ext cx="5440680" cy="2926080"/>
+            <a:ext cx="5440680" cy="3017520"/>
           </a:xfrm>
           <a:prstGeom prst="roundRect">
             <a:avLst>
-              <a:gd name="adj" fmla="val 2500"/>
+              <a:gd name="adj" fmla="val 2424"/>
             </a:avLst>
           </a:prstGeom>
           <a:solidFill>
@@ -9659,7 +10488,7 @@
         <p:spPr>
           <a:xfrm>
             <a:off x="713232" y="1819656"/>
-            <a:ext cx="845820" cy="256032"/>
+            <a:ext cx="457200" cy="256032"/>
           </a:xfrm>
           <a:prstGeom prst="roundRect">
             <a:avLst>
@@ -9686,7 +10515,7 @@
         <p:spPr>
           <a:xfrm>
             <a:off x="713232" y="1819656"/>
-            <a:ext cx="845820" cy="256032"/>
+            <a:ext cx="457200" cy="256032"/>
           </a:xfrm>
           <a:prstGeom prst="rect">
             <a:avLst/>
@@ -9713,7 +10542,7 @@
                 <a:ea typeface="Calibri" pitchFamily="34" charset="-122"/>
                 <a:cs typeface="Calibri" pitchFamily="34" charset="-120"/>
               </a:rPr>
-              <a:t>A WHIMPER</a:t>
+              <a:t>WEAK</a:t>
             </a:r>
             <a:endParaRPr lang="en-US" sz="1050" dirty="0"/>
           </a:p>
@@ -9728,7 +10557,7 @@
         <p:spPr>
           <a:xfrm>
             <a:off x="713232" y="2167128"/>
-            <a:ext cx="5111496" cy="2359152"/>
+            <a:ext cx="5111496" cy="2450592"/>
           </a:xfrm>
           <a:prstGeom prst="rect">
             <a:avLst/>
@@ -9755,7 +10584,7 @@
                 <a:ea typeface="Georgia" pitchFamily="34" charset="-122"/>
                 <a:cs typeface="Georgia" pitchFamily="34" charset="-120"/>
               </a:rPr>
-              <a:t>“In conclusion, ENSO affects clouds in many different ways and it is a complicated system. More research is needed to understand this further.”</a:t>
+              <a:t>“There are some limitations to this study, such as the short dataset. More data would improve the results and further research is needed.”</a:t>
             </a:r>
             <a:endParaRPr lang="en-US" sz="1400" dirty="0"/>
           </a:p>
@@ -9770,11 +10599,11 @@
         <p:spPr>
           <a:xfrm>
             <a:off x="6199632" y="1691640"/>
-            <a:ext cx="5440680" cy="2926080"/>
+            <a:ext cx="5440680" cy="3017520"/>
           </a:xfrm>
           <a:prstGeom prst="roundRect">
             <a:avLst>
-              <a:gd name="adj" fmla="val 2500"/>
+              <a:gd name="adj" fmla="val 2424"/>
             </a:avLst>
           </a:prstGeom>
           <a:solidFill>
@@ -9797,7 +10626,7 @@
         <p:spPr>
           <a:xfrm>
             <a:off x="6364224" y="1819656"/>
-            <a:ext cx="845820" cy="256032"/>
+            <a:ext cx="612648" cy="256032"/>
           </a:xfrm>
           <a:prstGeom prst="roundRect">
             <a:avLst>
@@ -9824,7 +10653,7 @@
         <p:spPr>
           <a:xfrm>
             <a:off x="6364224" y="1819656"/>
-            <a:ext cx="845820" cy="256032"/>
+            <a:ext cx="612648" cy="256032"/>
           </a:xfrm>
           <a:prstGeom prst="rect">
             <a:avLst/>
@@ -9851,7 +10680,7 @@
                 <a:ea typeface="Calibri" pitchFamily="34" charset="-122"/>
                 <a:cs typeface="Calibri" pitchFamily="34" charset="-120"/>
               </a:rPr>
-              <a:t>A LANDING</a:t>
+              <a:t>STRONG</a:t>
             </a:r>
             <a:endParaRPr lang="en-US" sz="1050" dirty="0"/>
           </a:p>
@@ -9866,7 +10695,7 @@
         <p:spPr>
           <a:xfrm>
             <a:off x="6364224" y="2167128"/>
-            <a:ext cx="5111496" cy="2359152"/>
+            <a:ext cx="5111496" cy="2450592"/>
           </a:xfrm>
           <a:prstGeom prst="rect">
             <a:avLst/>
@@ -9893,7 +10722,7 @@
                 <a:ea typeface="Georgia" pitchFamily="34" charset="-122"/>
                 <a:cs typeface="Georgia" pitchFamily="34" charset="-120"/>
               </a:rPr>
-              <a:t>“High cloud responds to ENSO in opposite senses on either side of the Pacific warm pool: over CP it increases by about [X] percentage points during El Niño, while over MC it decreases by about [Y]. The MC response is weaker and less consistent between events, so a single ‘ENSO cloud response’ is misleading. Compositing central- and eastern-Pacific El Niño events separately would test whether event type explains the inconsistency.” (illustrative)</a:t>
+              <a:t>“The 54 El Niño months come from only about six events, and 14 of them belong to the exceptionally strong 2015–16 event. Recomputing the composite without 2015–16 would show whether the CP signal is a property of El Niño in general or of one extreme event. In addition, ERA5 cloud cover comes from the model's cloud scheme rather than direct observation, so the magnitude (though probably not the sign) of the response should be treated with caution.”</a:t>
             </a:r>
             <a:endParaRPr lang="en-US" sz="1400" dirty="0"/>
           </a:p>
@@ -9907,7 +10736,7 @@
         </p:nvSpPr>
         <p:spPr>
           <a:xfrm>
-            <a:off x="548640" y="4800600"/>
+            <a:off x="548640" y="4892040"/>
             <a:ext cx="2743200" cy="274320"/>
           </a:xfrm>
           <a:prstGeom prst="rect">
@@ -9949,8 +10778,8 @@
         </p:nvSpPr>
         <p:spPr>
           <a:xfrm>
-            <a:off x="548640" y="5074920"/>
-            <a:ext cx="11064240" cy="1280160"/>
+            <a:off x="548640" y="5166360"/>
+            <a:ext cx="11064240" cy="1188720"/>
           </a:xfrm>
           <a:prstGeom prst="rect">
             <a:avLst/>
@@ -9978,7 +10807,7 @@
                 <a:ea typeface="Calibri" pitchFamily="34" charset="-122"/>
                 <a:cs typeface="Calibri" pitchFamily="34" charset="-120"/>
               </a:rPr>
-              <a:t>Sentence 1 answers the question</a:t>
+              <a:t>Specific:</a:t>
             </a:r>
             <a:r>
               <a:rPr lang="en-US" sz="1450" dirty="0">
@@ -9989,7 +10818,29 @@
                 <a:ea typeface="Calibri" pitchFamily="34" charset="-122"/>
                 <a:cs typeface="Calibri" pitchFamily="34" charset="-120"/>
               </a:rPr>
-              <a:t> in the same words and tags as the purpose statement.</a:t>
+              <a:t> says exactly what is limited, how much, and its likely </a:t>
+            </a:r>
+            <a:r>
+              <a:rPr lang="en-US" sz="1450" b="1" dirty="0">
+                <a:solidFill>
+                  <a:srgbClr val="222B36"/>
+                </a:solidFill>
+                <a:latin typeface="Calibri" pitchFamily="34" charset="0"/>
+                <a:ea typeface="Calibri" pitchFamily="34" charset="-122"/>
+                <a:cs typeface="Calibri" pitchFamily="34" charset="-120"/>
+              </a:rPr>
+              <a:t>effect on the answer</a:t>
+            </a:r>
+            <a:r>
+              <a:rPr lang="en-US" sz="1450" dirty="0">
+                <a:solidFill>
+                  <a:srgbClr val="222B36"/>
+                </a:solidFill>
+                <a:latin typeface="Calibri" pitchFamily="34" charset="0"/>
+                <a:ea typeface="Calibri" pitchFamily="34" charset="-122"/>
+                <a:cs typeface="Calibri" pitchFamily="34" charset="-120"/>
+              </a:rPr>
+              <a:t>.</a:t>
             </a:r>
             <a:endParaRPr lang="en-US" sz="1450" dirty="0"/>
           </a:p>
@@ -10010,7 +10861,7 @@
                 <a:ea typeface="Calibri" pitchFamily="34" charset="-122"/>
                 <a:cs typeface="Calibri" pitchFamily="34" charset="-120"/>
               </a:rPr>
-              <a:t>Findings carry their </a:t>
+              <a:t>Suggests a </a:t>
             </a:r>
             <a:r>
               <a:rPr lang="en-US" sz="1450" b="1" dirty="0">
@@ -10021,7 +10872,7 @@
                 <a:ea typeface="Calibri" pitchFamily="34" charset="-122"/>
                 <a:cs typeface="Calibri" pitchFamily="34" charset="-120"/>
               </a:rPr>
-              <a:t>key number</a:t>
+              <a:t>concrete check</a:t>
             </a:r>
             <a:r>
               <a:rPr lang="en-US" sz="1450" dirty="0">
@@ -10032,7 +10883,7 @@
                 <a:ea typeface="Calibri" pitchFamily="34" charset="-122"/>
                 <a:cs typeface="Calibri" pitchFamily="34" charset="-120"/>
               </a:rPr>
-              <a:t>. No new results, figures or citations.</a:t>
+              <a:t> instead of ‘more research is needed’.</a:t>
             </a:r>
             <a:endParaRPr lang="en-US" sz="1450" dirty="0"/>
           </a:p>
@@ -10053,7 +10904,7 @@
                 <a:ea typeface="Calibri" pitchFamily="34" charset="-122"/>
                 <a:cs typeface="Calibri" pitchFamily="34" charset="-120"/>
               </a:rPr>
-              <a:t>‘Further research’ becomes a </a:t>
+              <a:t>Picks limitations that </a:t>
             </a:r>
             <a:r>
               <a:rPr lang="en-US" sz="1450" b="1" dirty="0">
@@ -10064,7 +10915,7 @@
                 <a:ea typeface="Calibri" pitchFamily="34" charset="-122"/>
                 <a:cs typeface="Calibri" pitchFamily="34" charset="-120"/>
               </a:rPr>
-              <a:t>specific, testable next step</a:t>
+              <a:t>matter</a:t>
             </a:r>
             <a:r>
               <a:rPr lang="en-US" sz="1450" dirty="0">
@@ -10075,7 +10926,7 @@
                 <a:ea typeface="Calibri" pitchFamily="34" charset="-122"/>
                 <a:cs typeface="Calibri" pitchFamily="34" charset="-120"/>
               </a:rPr>
-              <a:t>, or is left out.</a:t>
+              <a:t> for this question, not a generic list.</a:t>
             </a:r>
             <a:endParaRPr lang="en-US" sz="1450" dirty="0"/>
           </a:p>
@@ -10117,7 +10968,7 @@
                 <a:ea typeface="Calibri" pitchFamily="34" charset="-122"/>
                 <a:cs typeface="Calibri" pitchFamily="34" charset="-120"/>
               </a:rPr>
-              <a:t>Source: Schultz, D. M. (2009) Eloquent Science, American Meteorological Society, §4.11 Conclusion, conclusions or summary.</a:t>
+              <a:t>Source: Schultz, D. M. (2009) Eloquent Science, American Meteorological Society, §7.2 ‘Making writing more accessible’ (justify assumptions; explain limitations).</a:t>
             </a:r>
             <a:endParaRPr lang="en-US" sz="900" dirty="0"/>
           </a:p>
@@ -10232,7 +11083,7 @@
                 <a:ea typeface="Georgia" pitchFamily="34" charset="-122"/>
                 <a:cs typeface="Georgia" pitchFamily="34" charset="-120"/>
               </a:rPr>
-              <a:t>The mirror test</a:t>
+              <a:t>Conclusions that land</a:t>
             </a:r>
             <a:endParaRPr lang="en-US" sz="2800" dirty="0"/>
           </a:p>
@@ -10240,26 +11091,68 @@
       </p:sp>
       <p:sp>
         <p:nvSpPr>
-          <p:cNvPr id="3" name="card_120"/>
+          <p:cNvPr id="3" name="text_120"/>
+          <p:cNvSpPr txBox="1"/>
+          <p:nvPr/>
+        </p:nvSpPr>
+        <p:spPr>
+          <a:xfrm>
+            <a:off x="548640" y="1188720"/>
+            <a:ext cx="11064240" cy="411480"/>
+          </a:xfrm>
+          <a:prstGeom prst="rect">
+            <a:avLst/>
+          </a:prstGeom>
+          <a:noFill/>
+          <a:ln/>
+        </p:spPr>
+        <p:txBody>
+          <a:bodyPr wrap="square" lIns="635" tIns="635" rIns="635" bIns="635" rtlCol="0" anchor="t"/>
+          <a:lstStyle/>
+          <a:p>
+            <a:pPr algn="l" indent="0" marL="0">
+              <a:lnSpc>
+                <a:spcPct val="100000"/>
+              </a:lnSpc>
+              <a:buNone/>
+            </a:pPr>
+            <a:r>
+              <a:rPr lang="en-US" sz="1500" i="1" dirty="0">
+                <a:solidFill>
+                  <a:srgbClr val="5B6573"/>
+                </a:solidFill>
+                <a:latin typeface="Calibri" pitchFamily="34" charset="0"/>
+                <a:ea typeface="Calibri" pitchFamily="34" charset="-122"/>
+                <a:cs typeface="Calibri" pitchFamily="34" charset="-120"/>
+              </a:rPr>
+              <a:t>Schultz: answer the question; two or three take-home findings; nothing new; end ‘forcefully, not on a whimper’.</a:t>
+            </a:r>
+            <a:endParaRPr lang="en-US" sz="1500" dirty="0"/>
+          </a:p>
+        </p:txBody>
+      </p:sp>
+      <p:sp>
+        <p:nvSpPr>
+          <p:cNvPr id="4" name="card_121"/>
           <p:cNvSpPr/>
           <p:nvPr/>
         </p:nvSpPr>
         <p:spPr>
           <a:xfrm>
-            <a:off x="548640" y="1371600"/>
-            <a:ext cx="5120640" cy="3017520"/>
+            <a:off x="548640" y="1691640"/>
+            <a:ext cx="5440680" cy="2926080"/>
           </a:xfrm>
           <a:prstGeom prst="roundRect">
             <a:avLst>
-              <a:gd name="adj" fmla="val 2424"/>
+              <a:gd name="adj" fmla="val 2500"/>
             </a:avLst>
           </a:prstGeom>
           <a:solidFill>
-            <a:srgbClr val="DCE7F2"/>
+            <a:srgbClr val="F5E0DA"/>
           </a:solidFill>
           <a:ln w="9525">
             <a:solidFill>
-              <a:srgbClr val="DCE7F2"/>
+              <a:srgbClr val="F5E0DA"/>
             </a:solidFill>
             <a:prstDash val="solid"/>
           </a:ln>
@@ -10267,14 +11160,14 @@
       </p:sp>
       <p:sp>
         <p:nvSpPr>
-          <p:cNvPr id="4" name="tag_121"/>
+          <p:cNvPr id="5" name="tag_122"/>
           <p:cNvSpPr/>
           <p:nvPr/>
         </p:nvSpPr>
         <p:spPr>
           <a:xfrm>
-            <a:off x="713232" y="1499616"/>
-            <a:ext cx="1623060" cy="256032"/>
+            <a:off x="713232" y="1819656"/>
+            <a:ext cx="845820" cy="256032"/>
           </a:xfrm>
           <a:prstGeom prst="roundRect">
             <a:avLst>
@@ -10282,11 +11175,11 @@
             </a:avLst>
           </a:prstGeom>
           <a:solidFill>
-            <a:srgbClr val="1B2A41"/>
+            <a:srgbClr val="B04A35"/>
           </a:solidFill>
           <a:ln w="12700">
             <a:solidFill>
-              <a:srgbClr val="1B2A41"/>
+              <a:srgbClr val="B04A35"/>
             </a:solidFill>
             <a:prstDash val="solid"/>
           </a:ln>
@@ -10294,14 +11187,14 @@
       </p:sp>
       <p:sp>
         <p:nvSpPr>
-          <p:cNvPr id="5" name="text_122"/>
+          <p:cNvPr id="6" name="text_123"/>
           <p:cNvSpPr txBox="1"/>
           <p:nvPr/>
         </p:nvSpPr>
         <p:spPr>
           <a:xfrm>
-            <a:off x="713232" y="1499616"/>
-            <a:ext cx="1623060" cy="256032"/>
+            <a:off x="713232" y="1819656"/>
+            <a:ext cx="845820" cy="256032"/>
           </a:xfrm>
           <a:prstGeom prst="rect">
             <a:avLst/>
@@ -10328,7 +11221,7 @@
                 <a:ea typeface="Calibri" pitchFamily="34" charset="-122"/>
                 <a:cs typeface="Calibri" pitchFamily="34" charset="-120"/>
               </a:rPr>
-              <a:t>END OF INTRODUCTION</a:t>
+              <a:t>A WHIMPER</a:t>
             </a:r>
             <a:endParaRPr lang="en-US" sz="1050" dirty="0"/>
           </a:p>
@@ -10336,14 +11229,14 @@
       </p:sp>
       <p:sp>
         <p:nvSpPr>
-          <p:cNvPr id="6" name="text_123"/>
+          <p:cNvPr id="7" name="text_124"/>
           <p:cNvSpPr txBox="1"/>
           <p:nvPr/>
         </p:nvSpPr>
         <p:spPr>
           <a:xfrm>
-            <a:off x="713232" y="1847088"/>
-            <a:ext cx="4791456" cy="2450592"/>
+            <a:off x="713232" y="2167128"/>
+            <a:ext cx="5111496" cy="2359152"/>
           </a:xfrm>
           <a:prstGeom prst="rect">
             <a:avLst/>
@@ -10362,7 +11255,7 @@
               <a:buNone/>
             </a:pPr>
             <a:r>
-              <a:rPr lang="en-US" sz="1500" i="1" dirty="0">
+              <a:rPr lang="en-US" sz="1400" i="1" dirty="0">
                 <a:solidFill>
                   <a:srgbClr val="222B36"/>
                 </a:solidFill>
@@ -10370,26 +11263,26 @@
                 <a:ea typeface="Georgia" pitchFamily="34" charset="-122"/>
                 <a:cs typeface="Georgia" pitchFamily="34" charset="-120"/>
               </a:rPr>
-              <a:t>“The purpose of this report is to test whether high cloud over the central Pacific (CP) and the Maritime Continent (MC) responds to ENSO in opposite senses, and to compare the strength of each relationship with the ONI.”</a:t>
-            </a:r>
-            <a:endParaRPr lang="en-US" sz="1500" dirty="0"/>
-          </a:p>
-        </p:txBody>
-      </p:sp>
-      <p:sp>
-        <p:nvSpPr>
-          <p:cNvPr id="7" name="card_124"/>
+              <a:t>“In conclusion, ENSO affects clouds in many different ways and it is a complicated system. More research is needed to understand this further.”</a:t>
+            </a:r>
+            <a:endParaRPr lang="en-US" sz="1400" dirty="0"/>
+          </a:p>
+        </p:txBody>
+      </p:sp>
+      <p:sp>
+        <p:nvSpPr>
+          <p:cNvPr id="8" name="card_125"/>
           <p:cNvSpPr/>
           <p:nvPr/>
         </p:nvSpPr>
         <p:spPr>
           <a:xfrm>
-            <a:off x="6519672" y="1371600"/>
-            <a:ext cx="5120640" cy="3017520"/>
+            <a:off x="6199632" y="1691640"/>
+            <a:ext cx="5440680" cy="2926080"/>
           </a:xfrm>
           <a:prstGeom prst="roundRect">
             <a:avLst>
-              <a:gd name="adj" fmla="val 2424"/>
+              <a:gd name="adj" fmla="val 2500"/>
             </a:avLst>
           </a:prstGeom>
           <a:solidFill>
@@ -10405,14 +11298,14 @@
       </p:sp>
       <p:sp>
         <p:nvSpPr>
-          <p:cNvPr id="8" name="tag_125"/>
+          <p:cNvPr id="9" name="tag_126"/>
           <p:cNvSpPr/>
           <p:nvPr/>
         </p:nvSpPr>
         <p:spPr>
           <a:xfrm>
-            <a:off x="6684264" y="1499616"/>
-            <a:ext cx="1623060" cy="256032"/>
+            <a:off x="6364224" y="1819656"/>
+            <a:ext cx="845820" cy="256032"/>
           </a:xfrm>
           <a:prstGeom prst="roundRect">
             <a:avLst>
@@ -10432,14 +11325,14 @@
       </p:sp>
       <p:sp>
         <p:nvSpPr>
-          <p:cNvPr id="9" name="text_126"/>
+          <p:cNvPr id="10" name="text_127"/>
           <p:cNvSpPr txBox="1"/>
           <p:nvPr/>
         </p:nvSpPr>
         <p:spPr>
           <a:xfrm>
-            <a:off x="6684264" y="1499616"/>
-            <a:ext cx="1623060" cy="256032"/>
+            <a:off x="6364224" y="1819656"/>
+            <a:ext cx="845820" cy="256032"/>
           </a:xfrm>
           <a:prstGeom prst="rect">
             <a:avLst/>
@@ -10466,7 +11359,7 @@
                 <a:ea typeface="Calibri" pitchFamily="34" charset="-122"/>
                 <a:cs typeface="Calibri" pitchFamily="34" charset="-120"/>
               </a:rPr>
-              <a:t>START OF CONCLUSION</a:t>
+              <a:t>A LANDING</a:t>
             </a:r>
             <a:endParaRPr lang="en-US" sz="1050" dirty="0"/>
           </a:p>
@@ -10474,14 +11367,14 @@
       </p:sp>
       <p:sp>
         <p:nvSpPr>
-          <p:cNvPr id="10" name="text_127"/>
+          <p:cNvPr id="11" name="text_128"/>
           <p:cNvSpPr txBox="1"/>
           <p:nvPr/>
         </p:nvSpPr>
         <p:spPr>
           <a:xfrm>
-            <a:off x="6684264" y="1847088"/>
-            <a:ext cx="4791456" cy="2450592"/>
+            <a:off x="6364224" y="2167128"/>
+            <a:ext cx="5111496" cy="2359152"/>
           </a:xfrm>
           <a:prstGeom prst="rect">
             <a:avLst/>
@@ -10500,7 +11393,7 @@
               <a:buNone/>
             </a:pPr>
             <a:r>
-              <a:rPr lang="en-US" sz="1500" i="1" dirty="0">
+              <a:rPr lang="en-US" sz="1400" i="1" dirty="0">
                 <a:solidFill>
                   <a:srgbClr val="222B36"/>
                 </a:solidFill>
@@ -10508,124 +11401,22 @@
                 <a:ea typeface="Georgia" pitchFamily="34" charset="-122"/>
                 <a:cs typeface="Georgia" pitchFamily="34" charset="-120"/>
               </a:rPr>
-              <a:t>“High cloud over CP and MC responds to ENSO in opposite senses, and the MC relationship with the ONI is the weaker of the two (r = [ ] vs [ ]).”</a:t>
-            </a:r>
-            <a:endParaRPr lang="en-US" sz="1500" dirty="0"/>
-          </a:p>
-        </p:txBody>
-      </p:sp>
-      <p:sp>
-        <p:nvSpPr>
-          <p:cNvPr id="11" name="arrow_128"/>
-          <p:cNvSpPr/>
-          <p:nvPr/>
-        </p:nvSpPr>
-        <p:spPr>
-          <a:xfrm>
-            <a:off x="5760720" y="2743200"/>
-            <a:ext cx="667512" cy="914"/>
-          </a:xfrm>
-          <a:prstGeom prst="line">
-            <a:avLst/>
-          </a:prstGeom>
-          <a:noFill/>
-          <a:ln w="31750">
-            <a:solidFill>
-              <a:srgbClr val="D98E1F"/>
-            </a:solidFill>
-            <a:prstDash val="solid"/>
-            <a:tailEnd type="triangle"/>
-          </a:ln>
-        </p:spPr>
-      </p:sp>
-      <p:sp>
-        <p:nvSpPr>
-          <p:cNvPr id="12" name="arrow_129"/>
-          <p:cNvSpPr/>
-          <p:nvPr/>
-        </p:nvSpPr>
-        <p:spPr>
-          <a:xfrm flipH="1">
-            <a:off x="5760720" y="3017520"/>
-            <a:ext cx="667512" cy="914"/>
-          </a:xfrm>
-          <a:prstGeom prst="line">
-            <a:avLst/>
-          </a:prstGeom>
-          <a:noFill/>
-          <a:ln w="31750">
-            <a:solidFill>
-              <a:srgbClr val="D98E1F"/>
-            </a:solidFill>
-            <a:prstDash val="solid"/>
-            <a:tailEnd type="triangle"/>
-          </a:ln>
-        </p:spPr>
-      </p:sp>
-      <p:sp>
-        <p:nvSpPr>
-          <p:cNvPr id="13" name="card_130"/>
-          <p:cNvSpPr/>
-          <p:nvPr/>
-        </p:nvSpPr>
-        <p:spPr>
-          <a:xfrm>
-            <a:off x="548640" y="4572000"/>
-            <a:ext cx="11091672" cy="1691640"/>
-          </a:xfrm>
-          <a:prstGeom prst="roundRect">
-            <a:avLst>
-              <a:gd name="adj" fmla="val 4324"/>
-            </a:avLst>
-          </a:prstGeom>
-          <a:solidFill>
-            <a:srgbClr val="F7F4EE"/>
-          </a:solidFill>
-          <a:ln w="9525">
-            <a:solidFill>
-              <a:srgbClr val="D5DAE1"/>
-            </a:solidFill>
-            <a:prstDash val="solid"/>
-          </a:ln>
-        </p:spPr>
-      </p:sp>
-      <p:sp>
-        <p:nvSpPr>
-          <p:cNvPr id="14" name="tag_131"/>
-          <p:cNvSpPr/>
-          <p:nvPr/>
-        </p:nvSpPr>
-        <p:spPr>
-          <a:xfrm>
-            <a:off x="713232" y="4700016"/>
-            <a:ext cx="2400300" cy="256032"/>
-          </a:xfrm>
-          <a:prstGeom prst="roundRect">
-            <a:avLst>
-              <a:gd name="adj" fmla="val 21429"/>
-            </a:avLst>
-          </a:prstGeom>
-          <a:solidFill>
-            <a:srgbClr val="D98E1F"/>
-          </a:solidFill>
-          <a:ln w="12700">
-            <a:solidFill>
-              <a:srgbClr val="D98E1F"/>
-            </a:solidFill>
-            <a:prstDash val="solid"/>
-          </a:ln>
-        </p:spPr>
-      </p:sp>
-      <p:sp>
-        <p:nvSpPr>
-          <p:cNvPr id="15" name="text_132"/>
+              <a:t>“High cloud responds to ENSO in opposite senses on either side of the Pacific warm pool: over CP it increases by about [X] percentage points during El Niño, while over MC it decreases by about [Y]. The MC response is weaker and less consistent between events, so a single ‘ENSO cloud response’ is misleading. Compositing central- and eastern-Pacific El Niño events separately would test whether event type explains the inconsistency.” (illustrative)</a:t>
+            </a:r>
+            <a:endParaRPr lang="en-US" sz="1400" dirty="0"/>
+          </a:p>
+        </p:txBody>
+      </p:sp>
+      <p:sp>
+        <p:nvSpPr>
+          <p:cNvPr id="12" name="text_129"/>
           <p:cNvSpPr txBox="1"/>
           <p:nvPr/>
         </p:nvSpPr>
         <p:spPr>
           <a:xfrm>
-            <a:off x="713232" y="4700016"/>
-            <a:ext cx="2400300" cy="256032"/>
+            <a:off x="548640" y="4800600"/>
+            <a:ext cx="2743200" cy="274320"/>
           </a:xfrm>
           <a:prstGeom prst="rect">
             <a:avLst/>
@@ -10634,40 +11425,40 @@
           <a:ln/>
         </p:spPr>
         <p:txBody>
-          <a:bodyPr wrap="square" lIns="0" tIns="0" rIns="0" bIns="0" rtlCol="0" anchor="ctr"/>
-          <a:lstStyle/>
-          <a:p>
-            <a:pPr algn="ctr" indent="0" marL="0">
+          <a:bodyPr wrap="square" lIns="635" tIns="635" rIns="635" bIns="635" rtlCol="0" anchor="t"/>
+          <a:lstStyle/>
+          <a:p>
+            <a:pPr algn="l" indent="0" marL="0">
               <a:lnSpc>
                 <a:spcPct val="100000"/>
               </a:lnSpc>
               <a:buNone/>
             </a:pPr>
             <a:r>
-              <a:rPr lang="en-US" sz="1050" b="1" dirty="0">
-                <a:solidFill>
-                  <a:srgbClr val="FFFFFF"/>
-                </a:solidFill>
-                <a:latin typeface="Calibri" pitchFamily="34" charset="0"/>
-                <a:ea typeface="Calibri" pitchFamily="34" charset="-122"/>
-                <a:cs typeface="Calibri" pitchFamily="34" charset="-120"/>
-              </a:rPr>
-              <a:t>PUT THEM SIDE BY SIDE AND ASK</a:t>
-            </a:r>
-            <a:endParaRPr lang="en-US" sz="1050" dirty="0"/>
-          </a:p>
-        </p:txBody>
-      </p:sp>
-      <p:sp>
-        <p:nvSpPr>
-          <p:cNvPr id="16" name="cardbody_133"/>
+              <a:rPr lang="en-US" sz="1100" b="1" dirty="0">
+                <a:solidFill>
+                  <a:srgbClr val="D98E1F"/>
+                </a:solidFill>
+                <a:latin typeface="Calibri" pitchFamily="34" charset="0"/>
+                <a:ea typeface="Calibri" pitchFamily="34" charset="-122"/>
+                <a:cs typeface="Calibri" pitchFamily="34" charset="-120"/>
+              </a:rPr>
+              <a:t>WHAT CHANGED</a:t>
+            </a:r>
+            <a:endParaRPr lang="en-US" sz="1100" dirty="0"/>
+          </a:p>
+        </p:txBody>
+      </p:sp>
+      <p:sp>
+        <p:nvSpPr>
+          <p:cNvPr id="13" name="changed_130"/>
           <p:cNvSpPr txBox="1"/>
           <p:nvPr/>
         </p:nvSpPr>
         <p:spPr>
           <a:xfrm>
-            <a:off x="713232" y="5047488"/>
-            <a:ext cx="10762488" cy="1124712"/>
+            <a:off x="548640" y="5074920"/>
+            <a:ext cx="11064240" cy="1280160"/>
           </a:xfrm>
           <a:prstGeom prst="rect">
             <a:avLst/>
@@ -10676,7 +11467,7 @@
           <a:ln/>
         </p:spPr>
         <p:txBody>
-          <a:bodyPr wrap="square" lIns="381" tIns="381" rIns="381" bIns="381" rtlCol="0" anchor="t"/>
+          <a:bodyPr wrap="square" lIns="635" tIns="635" rIns="635" bIns="635" rtlCol="0" anchor="t"/>
           <a:lstStyle/>
           <a:p>
             <a:pPr marL="342900" indent="-342900">
@@ -10687,6 +11478,17 @@
               <a:buChar char="■"/>
             </a:pPr>
             <a:r>
+              <a:rPr lang="en-US" sz="1450" b="1" dirty="0">
+                <a:solidFill>
+                  <a:srgbClr val="222B36"/>
+                </a:solidFill>
+                <a:latin typeface="Calibri" pitchFamily="34" charset="0"/>
+                <a:ea typeface="Calibri" pitchFamily="34" charset="-122"/>
+                <a:cs typeface="Calibri" pitchFamily="34" charset="-120"/>
+              </a:rPr>
+              <a:t>Sentence 1 answers the question</a:t>
+            </a:r>
+            <a:r>
               <a:rPr lang="en-US" sz="1450" dirty="0">
                 <a:solidFill>
                   <a:srgbClr val="222B36"/>
@@ -10695,29 +11497,7 @@
                 <a:ea typeface="Calibri" pitchFamily="34" charset="-122"/>
                 <a:cs typeface="Calibri" pitchFamily="34" charset="-120"/>
               </a:rPr>
-              <a:t>Does the conclusion answer </a:t>
-            </a:r>
-            <a:r>
-              <a:rPr lang="en-US" sz="1450" b="1" dirty="0">
-                <a:solidFill>
-                  <a:srgbClr val="222B36"/>
-                </a:solidFill>
-                <a:latin typeface="Calibri" pitchFamily="34" charset="0"/>
-                <a:ea typeface="Calibri" pitchFamily="34" charset="-122"/>
-                <a:cs typeface="Calibri" pitchFamily="34" charset="-120"/>
-              </a:rPr>
-              <a:t>exactly</a:t>
-            </a:r>
-            <a:r>
-              <a:rPr lang="en-US" sz="1450" dirty="0">
-                <a:solidFill>
-                  <a:srgbClr val="222B36"/>
-                </a:solidFill>
-                <a:latin typeface="Calibri" pitchFamily="34" charset="0"/>
-                <a:ea typeface="Calibri" pitchFamily="34" charset="-122"/>
-                <a:cs typeface="Calibri" pitchFamily="34" charset="-120"/>
-              </a:rPr>
-              <a:t> what the purpose promised: not more, not less?</a:t>
+              <a:t> in the same words and tags as the purpose statement.</a:t>
             </a:r>
             <a:endParaRPr lang="en-US" sz="1450" dirty="0"/>
           </a:p>
@@ -10738,7 +11518,7 @@
                 <a:ea typeface="Calibri" pitchFamily="34" charset="-122"/>
                 <a:cs typeface="Calibri" pitchFamily="34" charset="-120"/>
               </a:rPr>
-              <a:t>Are the </a:t>
+              <a:t>Findings carry their </a:t>
             </a:r>
             <a:r>
               <a:rPr lang="en-US" sz="1450" b="1" dirty="0">
@@ -10749,7 +11529,7 @@
                 <a:ea typeface="Calibri" pitchFamily="34" charset="-122"/>
                 <a:cs typeface="Calibri" pitchFamily="34" charset="-120"/>
               </a:rPr>
-              <a:t>same tag-phrases</a:t>
+              <a:t>key number</a:t>
             </a:r>
             <a:r>
               <a:rPr lang="en-US" sz="1450" dirty="0">
@@ -10760,7 +11540,7 @@
                 <a:ea typeface="Calibri" pitchFamily="34" charset="-122"/>
                 <a:cs typeface="Calibri" pitchFamily="34" charset="-120"/>
               </a:rPr>
-              <a:t> used (CP, MC, ONI)?</a:t>
+              <a:t>. No new results, figures or citations.</a:t>
             </a:r>
             <a:endParaRPr lang="en-US" sz="1450" dirty="0"/>
           </a:p>
@@ -10781,7 +11561,7 @@
                 <a:ea typeface="Calibri" pitchFamily="34" charset="-122"/>
                 <a:cs typeface="Calibri" pitchFamily="34" charset="-120"/>
               </a:rPr>
-              <a:t>Would a reader who read only these two boxes know your question </a:t>
+              <a:t>‘Further research’ becomes a </a:t>
             </a:r>
             <a:r>
               <a:rPr lang="en-US" sz="1450" b="1" dirty="0">
@@ -10792,7 +11572,7 @@
                 <a:ea typeface="Calibri" pitchFamily="34" charset="-122"/>
                 <a:cs typeface="Calibri" pitchFamily="34" charset="-120"/>
               </a:rPr>
-              <a:t>and</a:t>
+              <a:t>specific, testable next step</a:t>
             </a:r>
             <a:r>
               <a:rPr lang="en-US" sz="1450" dirty="0">
@@ -10803,7 +11583,7 @@
                 <a:ea typeface="Calibri" pitchFamily="34" charset="-122"/>
                 <a:cs typeface="Calibri" pitchFamily="34" charset="-120"/>
               </a:rPr>
-              <a:t> your answer? (Many will read only these.)</a:t>
+              <a:t>, or is left out.</a:t>
             </a:r>
             <a:endParaRPr lang="en-US" sz="1450" dirty="0"/>
           </a:p>
@@ -10811,7 +11591,7 @@
       </p:sp>
       <p:sp>
         <p:nvSpPr>
-          <p:cNvPr id="17" name="text_134"/>
+          <p:cNvPr id="14" name="text_131"/>
           <p:cNvSpPr txBox="1"/>
           <p:nvPr/>
         </p:nvSpPr>
@@ -10845,7 +11625,7 @@
                 <a:ea typeface="Calibri" pitchFamily="34" charset="-122"/>
                 <a:cs typeface="Calibri" pitchFamily="34" charset="-120"/>
               </a:rPr>
-              <a:t>Source: Schultz, D. M. (2009) Eloquent Science, American Meteorological Society, §4.11; final checks sidebar in §13.6 (abstract and conclusions consistent).</a:t>
+              <a:t>Source: Schultz, D. M. (2009) Eloquent Science, American Meteorological Society, §4.11 Conclusion, conclusions or summary.</a:t>
             </a:r>
             <a:endParaRPr lang="en-US" sz="900" dirty="0"/>
           </a:p>
